--- a/reports/resumen_proyecto_SAM.pptx
+++ b/reports/resumen_proyecto_SAM.pptx
@@ -14,6 +14,7 @@
     <p:sldId id="262" r:id="rId13"/>
     <p:sldId id="263" r:id="rId14"/>
     <p:sldId id="264" r:id="rId15"/>
+    <p:sldId id="265" r:id="rId16"/>
   </p:sldIdLst>
   <p:sldSz cx="12192000" cy="6858000" type="screen4x3"/>
   <p:notesSz cx="6858000" cy="9144000"/>
@@ -3412,6 +3413,81 @@
 </p:sld>
 </file>
 
+<file path=ppt/slides/slide10.xml><?xml version="1.0" encoding="utf-8"?>
+<p:sld xmlns:a="http://schemas.openxmlformats.org/drawingml/2006/main" xmlns:p="http://schemas.openxmlformats.org/presentationml/2006/main" xmlns:r="http://schemas.openxmlformats.org/officeDocument/2006/relationships">
+  <p:cSld>
+    <p:spTree>
+      <p:nvGrpSpPr>
+        <p:cNvPr id="1" name=""/>
+        <p:cNvGrpSpPr/>
+        <p:nvPr/>
+      </p:nvGrpSpPr>
+      <p:grpSpPr/>
+      <p:pic>
+        <p:nvPicPr>
+          <p:cNvPr id="2" name="Picture 1" descr="austral_closing_bg.jpg"/>
+          <p:cNvPicPr>
+            <a:picLocks noChangeAspect="1"/>
+          </p:cNvPicPr>
+          <p:nvPr/>
+        </p:nvPicPr>
+        <p:blipFill>
+          <a:blip r:embed="rId2"/>
+          <a:stretch>
+            <a:fillRect/>
+          </a:stretch>
+        </p:blipFill>
+        <p:spPr>
+          <a:xfrm>
+            <a:off x="0" y="0"/>
+            <a:ext cx="12192000" cy="6858000"/>
+          </a:xfrm>
+          <a:prstGeom prst="rect">
+            <a:avLst/>
+          </a:prstGeom>
+        </p:spPr>
+      </p:pic>
+      <p:sp>
+        <p:nvSpPr>
+          <p:cNvPr id="3" name="TextBox 2"/>
+          <p:cNvSpPr txBox="1"/>
+          <p:nvPr/>
+        </p:nvSpPr>
+        <p:spPr>
+          <a:xfrm>
+            <a:off x="700000" y="3000000"/>
+            <a:ext cx="6000000" cy="900000"/>
+          </a:xfrm>
+          <a:prstGeom prst="rect">
+            <a:avLst/>
+          </a:prstGeom>
+          <a:noFill/>
+        </p:spPr>
+        <p:txBody>
+          <a:bodyPr wrap="none">
+            <a:spAutoFit/>
+          </a:bodyPr>
+          <a:lstStyle/>
+          <a:p>
+            <a:r>
+              <a:rPr sz="3600" b="1">
+                <a:solidFill>
+                  <a:srgbClr val="1C3087"/>
+                </a:solidFill>
+              </a:rPr>
+              <a:t>MUCHAS GRACIAS</a:t>
+            </a:r>
+          </a:p>
+        </p:txBody>
+      </p:sp>
+    </p:spTree>
+  </p:cSld>
+  <p:clrMapOvr>
+    <a:masterClrMapping/>
+  </p:clrMapOvr>
+</p:sld>
+</file>
+
 <file path=ppt/slides/slide2.xml><?xml version="1.0" encoding="utf-8"?>
 <p:sld xmlns:a="http://schemas.openxmlformats.org/drawingml/2006/main" xmlns:p="http://schemas.openxmlformats.org/presentationml/2006/main" xmlns:r="http://schemas.openxmlformats.org/officeDocument/2006/relationships">
   <p:cSld>
@@ -3885,7 +3961,7 @@
         </p:nvGraphicFramePr>
         <p:xfrm>
           <a:off x="700000" y="1500000"/>
-          <a:ext cx="10800000" cy="5180000"/>
+          <a:ext cx="10800000" cy="5250000"/>
         </p:xfrm>
         <a:graphic>
           <a:graphicData uri="http://schemas.openxmlformats.org/drawingml/2006/table">
@@ -3898,7 +3974,7 @@
                 <a:gridCol w="7600000"/>
                 <a:gridCol w="1600000"/>
               </a:tblGrid>
-              <a:tr h="370000">
+              <a:tr h="350000">
                 <a:tc>
                   <a:txBody>
                     <a:bodyPr wrap="square"/>
@@ -3969,7 +4045,7 @@
                   </a:tcPr>
                 </a:tc>
               </a:tr>
-              <a:tr h="370000">
+              <a:tr h="350000">
                 <a:tc>
                   <a:txBody>
                     <a:bodyPr wrap="square"/>
@@ -4040,7 +4116,7 @@
                   </a:tcPr>
                 </a:tc>
               </a:tr>
-              <a:tr h="370000">
+              <a:tr h="350000">
                 <a:tc>
                   <a:txBody>
                     <a:bodyPr wrap="square"/>
@@ -4111,7 +4187,7 @@
                   </a:tcPr>
                 </a:tc>
               </a:tr>
-              <a:tr h="370000">
+              <a:tr h="350000">
                 <a:tc>
                   <a:txBody>
                     <a:bodyPr wrap="square"/>
@@ -4182,7 +4258,7 @@
                   </a:tcPr>
                 </a:tc>
               </a:tr>
-              <a:tr h="370000">
+              <a:tr h="350000">
                 <a:tc>
                   <a:txBody>
                     <a:bodyPr wrap="square"/>
@@ -4253,7 +4329,7 @@
                   </a:tcPr>
                 </a:tc>
               </a:tr>
-              <a:tr h="370000">
+              <a:tr h="350000">
                 <a:tc>
                   <a:txBody>
                     <a:bodyPr wrap="square"/>
@@ -4324,7 +4400,7 @@
                   </a:tcPr>
                 </a:tc>
               </a:tr>
-              <a:tr h="370000">
+              <a:tr h="350000">
                 <a:tc>
                   <a:txBody>
                     <a:bodyPr wrap="square"/>
@@ -4395,7 +4471,7 @@
                   </a:tcPr>
                 </a:tc>
               </a:tr>
-              <a:tr h="370000">
+              <a:tr h="350000">
                 <a:tc>
                   <a:txBody>
                     <a:bodyPr wrap="square"/>
@@ -4466,7 +4542,7 @@
                   </a:tcPr>
                 </a:tc>
               </a:tr>
-              <a:tr h="370000">
+              <a:tr h="350000">
                 <a:tc>
                   <a:txBody>
                     <a:bodyPr wrap="square"/>
@@ -4537,7 +4613,7 @@
                   </a:tcPr>
                 </a:tc>
               </a:tr>
-              <a:tr h="370000">
+              <a:tr h="350000">
                 <a:tc>
                   <a:txBody>
                     <a:bodyPr wrap="square"/>
@@ -4608,7 +4684,7 @@
                   </a:tcPr>
                 </a:tc>
               </a:tr>
-              <a:tr h="370000">
+              <a:tr h="350000">
                 <a:tc>
                   <a:txBody>
                     <a:bodyPr wrap="square"/>
@@ -4679,7 +4755,7 @@
                   </a:tcPr>
                 </a:tc>
               </a:tr>
-              <a:tr h="370000">
+              <a:tr h="350000">
                 <a:tc>
                   <a:txBody>
                     <a:bodyPr wrap="square"/>
@@ -4750,7 +4826,7 @@
                   </a:tcPr>
                 </a:tc>
               </a:tr>
-              <a:tr h="370000">
+              <a:tr h="350000">
                 <a:tc>
                   <a:txBody>
                     <a:bodyPr wrap="square"/>
@@ -4821,7 +4897,7 @@
                   </a:tcPr>
                 </a:tc>
               </a:tr>
-              <a:tr h="370000">
+              <a:tr h="350000">
                 <a:tc>
                   <a:txBody>
                     <a:bodyPr wrap="square"/>
@@ -4858,7 +4934,7 @@
                           </a:solidFill>
                           <a:latin typeface="Calibri"/>
                         </a:rPr>
-                        <a:t>Criterio de Kelly (escala por segmento)</a:t>
+                        <a:t>Criterio de Kelly (escala por segmento) — casi empata al campeon</a:t>
                       </a:r>
                     </a:p>
                   </a:txBody>
@@ -4888,6 +4964,77 @@
                   <a:tcPr marL="90000" marR="90000" marT="18000" marB="18000">
                     <a:solidFill>
                       <a:srgbClr val="FFFFFF"/>
+                    </a:solidFill>
+                  </a:tcPr>
+                </a:tc>
+              </a:tr>
+              <a:tr h="350000">
+                <a:tc>
+                  <a:txBody>
+                    <a:bodyPr wrap="square"/>
+                    <a:lstStyle/>
+                    <a:p>
+                      <a:pPr algn="l"/>
+                      <a:r>
+                        <a:rPr sz="1000" b="0">
+                          <a:solidFill>
+                            <a:srgbClr val="5B5B5B"/>
+                          </a:solidFill>
+                          <a:latin typeface="Calibri"/>
+                        </a:rPr>
+                        <a:t>Extra</a:t>
+                      </a:r>
+                    </a:p>
+                  </a:txBody>
+                  <a:tcPr marL="90000" marR="90000" marT="18000" marB="18000">
+                    <a:solidFill>
+                      <a:srgbClr val="F7F8FC"/>
+                    </a:solidFill>
+                  </a:tcPr>
+                </a:tc>
+                <a:tc>
+                  <a:txBody>
+                    <a:bodyPr wrap="square"/>
+                    <a:lstStyle/>
+                    <a:p>
+                      <a:pPr algn="l"/>
+                      <a:r>
+                        <a:rPr sz="1050" b="0">
+                          <a:solidFill>
+                            <a:srgbClr val="222222"/>
+                          </a:solidFill>
+                          <a:latin typeface="Calibri"/>
+                        </a:rPr>
+                        <a:t>Edge por bucket (segmento x precio) — no supera al campeon</a:t>
+                      </a:r>
+                    </a:p>
+                  </a:txBody>
+                  <a:tcPr marL="90000" marR="90000" marT="18000" marB="18000">
+                    <a:solidFill>
+                      <a:srgbClr val="F7F8FC"/>
+                    </a:solidFill>
+                  </a:tcPr>
+                </a:tc>
+                <a:tc>
+                  <a:txBody>
+                    <a:bodyPr wrap="square"/>
+                    <a:lstStyle/>
+                    <a:p>
+                      <a:pPr algn="ctr"/>
+                      <a:r>
+                        <a:rPr sz="950" b="1">
+                          <a:solidFill>
+                            <a:srgbClr val="C68136"/>
+                          </a:solidFill>
+                          <a:latin typeface="Calibri"/>
+                        </a:rPr>
+                        <a:t>MIXTO</a:t>
+                      </a:r>
+                    </a:p>
+                  </a:txBody>
+                  <a:tcPr marL="90000" marR="90000" marT="18000" marB="18000">
+                    <a:solidFill>
+                      <a:srgbClr val="F7F8FC"/>
                     </a:solidFill>
                   </a:tcPr>
                 </a:tc>
@@ -6300,7 +6447,7 @@
                   <a:srgbClr val="1C9C82"/>
                 </a:solidFill>
               </a:rPr>
-              <a:t>Mean ROI local: 0.83 plano = 9.95%  →  Kelly por segmento = 10.15%  (mejora chica pero real)</a:t>
+              <a:t>Local: 0.83 plano = 9.95%  →  Kelly = 10.15%  ·  Practice real: Kelly 32.57% vs campeon 32.72% (empate practico)</a:t>
             </a:r>
           </a:p>
         </p:txBody>
@@ -6380,7 +6527,7 @@
             <a:avLst/>
           </a:prstGeom>
           <a:solidFill>
-            <a:srgbClr val="DB5B7D"/>
+            <a:srgbClr val="1C9C82"/>
           </a:solidFill>
           <a:ln>
             <a:noFill/>
@@ -6462,7 +6609,7 @@
                 </a:solidFill>
                 <a:latin typeface="Calibri"/>
               </a:rPr>
-              <a:t>RECOMENDACION FINAL</a:t>
+              <a:t>EXPERIMENTO NUEVO</a:t>
             </a:r>
           </a:p>
         </p:txBody>
@@ -6496,20 +6643,466 @@
                 </a:solidFill>
                 <a:latin typeface="Calibri"/>
               </a:rPr>
-              <a:t>Modelo elegido para la proxima ronda</a:t>
-            </a:r>
-          </a:p>
-        </p:txBody>
-      </p:sp>
-      <p:sp>
-        <p:nvSpPr>
-          <p:cNvPr id="6" name="Rounded Rectangle 5"/>
+              <a:t>Edge (valor esperado) por segmento x precio</a:t>
+            </a:r>
+          </a:p>
+        </p:txBody>
+      </p:sp>
+      <p:sp>
+        <p:nvSpPr>
+          <p:cNvPr id="6" name="TextBox 5"/>
+          <p:cNvSpPr txBox="1"/>
+          <p:nvPr/>
+        </p:nvSpPr>
+        <p:spPr>
+          <a:xfrm>
+            <a:off x="700000" y="1550000"/>
+            <a:ext cx="10800000" cy="1000000"/>
+          </a:xfrm>
+          <a:prstGeom prst="rect">
+            <a:avLst/>
+          </a:prstGeom>
+          <a:noFill/>
+        </p:spPr>
+        <p:txBody>
+          <a:bodyPr wrap="square">
+            <a:spAutoFit/>
+          </a:bodyPr>
+          <a:lstStyle/>
+          <a:p>
+            <a:pPr>
+              <a:lnSpc>
+                <a:spcPct val="120000"/>
+              </a:lnSpc>
+              <a:spcAft>
+                <a:spcPts val="1200"/>
+              </a:spcAft>
+            </a:pPr>
+            <a:r>
+              <a:rPr sz="1500">
+                <a:solidFill>
+                  <a:srgbClr val="222222"/>
+                </a:solidFill>
+                <a:latin typeface="Calibri"/>
+              </a:rPr>
+              <a:t>EV = P(ganar) x (valor_real − costo pagado). Kelly ya midio esto por segmento y no encontro diferencia. Cortando mas fino — segmento x tercil de precio predicho — SI aparece un patron real y consistente.</a:t>
+            </a:r>
+          </a:p>
+        </p:txBody>
+      </p:sp>
+      <p:graphicFrame>
+        <p:nvGraphicFramePr>
+          <p:cNvPr id="7" name="Table 6"/>
+          <p:cNvGraphicFramePr>
+            <a:graphicFrameLocks noGrp="1"/>
+          </p:cNvGraphicFramePr>
+          <p:nvPr/>
+        </p:nvGraphicFramePr>
+        <p:xfrm>
+          <a:off x="1600000" y="2650000"/>
+          <a:ext cx="9000000" cy="1500000"/>
+        </p:xfrm>
+        <a:graphic>
+          <a:graphicData uri="http://schemas.openxmlformats.org/drawingml/2006/table">
+            <a:tbl>
+              <a:tblPr firstRow="1" bandRow="1">
+                <a:tableStyleId>{5C22544A-7EE6-4342-B048-85BDC9FD1C3A}</a:tableStyleId>
+              </a:tblPr>
+              <a:tblGrid>
+                <a:gridCol w="2250000"/>
+                <a:gridCol w="2250000"/>
+                <a:gridCol w="2250000"/>
+                <a:gridCol w="2250000"/>
+              </a:tblGrid>
+              <a:tr h="375000">
+                <a:tc>
+                  <a:txBody>
+                    <a:bodyPr wrap="square"/>
+                    <a:lstStyle/>
+                    <a:p>
+                      <a:pPr algn="ctr"/>
+                      <a:r>
+                        <a:rPr sz="1200" b="1">
+                          <a:solidFill>
+                            <a:srgbClr val="FFFFFF"/>
+                          </a:solidFill>
+                          <a:latin typeface="Calibri"/>
+                        </a:rPr>
+                        <a:t>Bucket</a:t>
+                      </a:r>
+                    </a:p>
+                  </a:txBody>
+                  <a:tcPr marL="90000" marR="90000" marT="18000" marB="18000">
+                    <a:solidFill>
+                      <a:srgbClr val="1C3087"/>
+                    </a:solidFill>
+                  </a:tcPr>
+                </a:tc>
+                <a:tc>
+                  <a:txBody>
+                    <a:bodyPr wrap="square"/>
+                    <a:lstStyle/>
+                    <a:p>
+                      <a:pPr algn="ctr"/>
+                      <a:r>
+                        <a:rPr sz="1200" b="1">
+                          <a:solidFill>
+                            <a:srgbClr val="FFFFFF"/>
+                          </a:solidFill>
+                          <a:latin typeface="Calibri"/>
+                        </a:rPr>
+                        <a:t>Hit Rate</a:t>
+                      </a:r>
+                    </a:p>
+                  </a:txBody>
+                  <a:tcPr marL="90000" marR="90000" marT="18000" marB="18000">
+                    <a:solidFill>
+                      <a:srgbClr val="1C3087"/>
+                    </a:solidFill>
+                  </a:tcPr>
+                </a:tc>
+                <a:tc>
+                  <a:txBody>
+                    <a:bodyPr wrap="square"/>
+                    <a:lstStyle/>
+                    <a:p>
+                      <a:pPr algn="ctr"/>
+                      <a:r>
+                        <a:rPr sz="1200" b="1">
+                          <a:solidFill>
+                            <a:srgbClr val="FFFFFF"/>
+                          </a:solidFill>
+                          <a:latin typeface="Calibri"/>
+                        </a:rPr>
+                        <a:t>EV (% del bid)</a:t>
+                      </a:r>
+                    </a:p>
+                  </a:txBody>
+                  <a:tcPr marL="90000" marR="90000" marT="18000" marB="18000">
+                    <a:solidFill>
+                      <a:srgbClr val="1C3087"/>
+                    </a:solidFill>
+                  </a:tcPr>
+                </a:tc>
+                <a:tc>
+                  <a:txBody>
+                    <a:bodyPr wrap="square"/>
+                    <a:lstStyle/>
+                    <a:p>
+                      <a:pPr algn="ctr"/>
+                      <a:r>
+                        <a:rPr sz="1200" b="1">
+                          <a:solidFill>
+                            <a:srgbClr val="FFFFFF"/>
+                          </a:solidFill>
+                          <a:latin typeface="Calibri"/>
+                        </a:rPr>
+                        <a:t>Escala</a:t>
+                      </a:r>
+                    </a:p>
+                  </a:txBody>
+                  <a:tcPr marL="90000" marR="90000" marT="18000" marB="18000">
+                    <a:solidFill>
+                      <a:srgbClr val="1C3087"/>
+                    </a:solidFill>
+                  </a:tcPr>
+                </a:tc>
+              </a:tr>
+              <a:tr h="375000">
+                <a:tc>
+                  <a:txBody>
+                    <a:bodyPr wrap="square"/>
+                    <a:lstStyle/>
+                    <a:p>
+                      <a:pPr algn="ctr"/>
+                      <a:r>
+                        <a:rPr sz="1100" b="0">
+                          <a:solidFill>
+                            <a:srgbClr val="222222"/>
+                          </a:solidFill>
+                          <a:latin typeface="Calibri"/>
+                        </a:rPr>
+                        <a:t>bajo (los 3 segmentos)</a:t>
+                      </a:r>
+                    </a:p>
+                  </a:txBody>
+                  <a:tcPr marL="90000" marR="90000" marT="18000" marB="18000">
+                    <a:solidFill>
+                      <a:srgbClr val="FFFFFF"/>
+                    </a:solidFill>
+                  </a:tcPr>
+                </a:tc>
+                <a:tc>
+                  <a:txBody>
+                    <a:bodyPr wrap="square"/>
+                    <a:lstStyle/>
+                    <a:p>
+                      <a:pPr algn="ctr"/>
+                      <a:r>
+                        <a:rPr sz="1100" b="0">
+                          <a:solidFill>
+                            <a:srgbClr val="222222"/>
+                          </a:solidFill>
+                          <a:latin typeface="Calibri"/>
+                        </a:rPr>
+                        <a:t>77.2%</a:t>
+                      </a:r>
+                    </a:p>
+                  </a:txBody>
+                  <a:tcPr marL="90000" marR="90000" marT="18000" marB="18000">
+                    <a:solidFill>
+                      <a:srgbClr val="FFFFFF"/>
+                    </a:solidFill>
+                  </a:tcPr>
+                </a:tc>
+                <a:tc>
+                  <a:txBody>
+                    <a:bodyPr wrap="square"/>
+                    <a:lstStyle/>
+                    <a:p>
+                      <a:pPr algn="ctr"/>
+                      <a:r>
+                        <a:rPr sz="1100" b="0">
+                          <a:solidFill>
+                            <a:srgbClr val="222222"/>
+                          </a:solidFill>
+                          <a:latin typeface="Calibri"/>
+                        </a:rPr>
+                        <a:t>1.51%</a:t>
+                      </a:r>
+                    </a:p>
+                  </a:txBody>
+                  <a:tcPr marL="90000" marR="90000" marT="18000" marB="18000">
+                    <a:solidFill>
+                      <a:srgbClr val="FFFFFF"/>
+                    </a:solidFill>
+                  </a:tcPr>
+                </a:tc>
+                <a:tc>
+                  <a:txBody>
+                    <a:bodyPr wrap="square"/>
+                    <a:lstStyle/>
+                    <a:p>
+                      <a:pPr algn="ctr"/>
+                      <a:r>
+                        <a:rPr sz="1100" b="0">
+                          <a:solidFill>
+                            <a:srgbClr val="222222"/>
+                          </a:solidFill>
+                          <a:latin typeface="Calibri"/>
+                        </a:rPr>
+                        <a:t>~0.80</a:t>
+                      </a:r>
+                    </a:p>
+                  </a:txBody>
+                  <a:tcPr marL="90000" marR="90000" marT="18000" marB="18000">
+                    <a:solidFill>
+                      <a:srgbClr val="FFFFFF"/>
+                    </a:solidFill>
+                  </a:tcPr>
+                </a:tc>
+              </a:tr>
+              <a:tr h="375000">
+                <a:tc>
+                  <a:txBody>
+                    <a:bodyPr wrap="square"/>
+                    <a:lstStyle/>
+                    <a:p>
+                      <a:pPr algn="ctr"/>
+                      <a:r>
+                        <a:rPr sz="1100" b="0">
+                          <a:solidFill>
+                            <a:srgbClr val="222222"/>
+                          </a:solidFill>
+                          <a:latin typeface="Calibri"/>
+                        </a:rPr>
+                        <a:t>medio (los 3 segmentos)</a:t>
+                      </a:r>
+                    </a:p>
+                  </a:txBody>
+                  <a:tcPr marL="90000" marR="90000" marT="18000" marB="18000">
+                    <a:solidFill>
+                      <a:srgbClr val="F7F8FC"/>
+                    </a:solidFill>
+                  </a:tcPr>
+                </a:tc>
+                <a:tc>
+                  <a:txBody>
+                    <a:bodyPr wrap="square"/>
+                    <a:lstStyle/>
+                    <a:p>
+                      <a:pPr algn="ctr"/>
+                      <a:r>
+                        <a:rPr sz="1100" b="0">
+                          <a:solidFill>
+                            <a:srgbClr val="222222"/>
+                          </a:solidFill>
+                          <a:latin typeface="Calibri"/>
+                        </a:rPr>
+                        <a:t>86.1%</a:t>
+                      </a:r>
+                    </a:p>
+                  </a:txBody>
+                  <a:tcPr marL="90000" marR="90000" marT="18000" marB="18000">
+                    <a:solidFill>
+                      <a:srgbClr val="F7F8FC"/>
+                    </a:solidFill>
+                  </a:tcPr>
+                </a:tc>
+                <a:tc>
+                  <a:txBody>
+                    <a:bodyPr wrap="square"/>
+                    <a:lstStyle/>
+                    <a:p>
+                      <a:pPr algn="ctr"/>
+                      <a:r>
+                        <a:rPr sz="1100" b="0">
+                          <a:solidFill>
+                            <a:srgbClr val="222222"/>
+                          </a:solidFill>
+                          <a:latin typeface="Calibri"/>
+                        </a:rPr>
+                        <a:t>1.75%</a:t>
+                      </a:r>
+                    </a:p>
+                  </a:txBody>
+                  <a:tcPr marL="90000" marR="90000" marT="18000" marB="18000">
+                    <a:solidFill>
+                      <a:srgbClr val="F7F8FC"/>
+                    </a:solidFill>
+                  </a:tcPr>
+                </a:tc>
+                <a:tc>
+                  <a:txBody>
+                    <a:bodyPr wrap="square"/>
+                    <a:lstStyle/>
+                    <a:p>
+                      <a:pPr algn="ctr"/>
+                      <a:r>
+                        <a:rPr sz="1100" b="0">
+                          <a:solidFill>
+                            <a:srgbClr val="222222"/>
+                          </a:solidFill>
+                          <a:latin typeface="Calibri"/>
+                        </a:rPr>
+                        <a:t>~0.83</a:t>
+                      </a:r>
+                    </a:p>
+                  </a:txBody>
+                  <a:tcPr marL="90000" marR="90000" marT="18000" marB="18000">
+                    <a:solidFill>
+                      <a:srgbClr val="F7F8FC"/>
+                    </a:solidFill>
+                  </a:tcPr>
+                </a:tc>
+              </a:tr>
+              <a:tr h="375000">
+                <a:tc>
+                  <a:txBody>
+                    <a:bodyPr wrap="square"/>
+                    <a:lstStyle/>
+                    <a:p>
+                      <a:pPr algn="ctr"/>
+                      <a:r>
+                        <a:rPr sz="1100" b="0">
+                          <a:solidFill>
+                            <a:srgbClr val="222222"/>
+                          </a:solidFill>
+                          <a:latin typeface="Calibri"/>
+                        </a:rPr>
+                        <a:t>alto (los 3 segmentos)</a:t>
+                      </a:r>
+                    </a:p>
+                  </a:txBody>
+                  <a:tcPr marL="90000" marR="90000" marT="18000" marB="18000">
+                    <a:solidFill>
+                      <a:srgbClr val="FFFFFF"/>
+                    </a:solidFill>
+                  </a:tcPr>
+                </a:tc>
+                <a:tc>
+                  <a:txBody>
+                    <a:bodyPr wrap="square"/>
+                    <a:lstStyle/>
+                    <a:p>
+                      <a:pPr algn="ctr"/>
+                      <a:r>
+                        <a:rPr sz="1100" b="0">
+                          <a:solidFill>
+                            <a:srgbClr val="222222"/>
+                          </a:solidFill>
+                          <a:latin typeface="Calibri"/>
+                        </a:rPr>
+                        <a:t>91.4%</a:t>
+                      </a:r>
+                    </a:p>
+                  </a:txBody>
+                  <a:tcPr marL="90000" marR="90000" marT="18000" marB="18000">
+                    <a:solidFill>
+                      <a:srgbClr val="FFFFFF"/>
+                    </a:solidFill>
+                  </a:tcPr>
+                </a:tc>
+                <a:tc>
+                  <a:txBody>
+                    <a:bodyPr wrap="square"/>
+                    <a:lstStyle/>
+                    <a:p>
+                      <a:pPr algn="ctr"/>
+                      <a:r>
+                        <a:rPr sz="1100" b="0">
+                          <a:solidFill>
+                            <a:srgbClr val="222222"/>
+                          </a:solidFill>
+                          <a:latin typeface="Calibri"/>
+                        </a:rPr>
+                        <a:t>2.06%</a:t>
+                      </a:r>
+                    </a:p>
+                  </a:txBody>
+                  <a:tcPr marL="90000" marR="90000" marT="18000" marB="18000">
+                    <a:solidFill>
+                      <a:srgbClr val="FFFFFF"/>
+                    </a:solidFill>
+                  </a:tcPr>
+                </a:tc>
+                <a:tc>
+                  <a:txBody>
+                    <a:bodyPr wrap="square"/>
+                    <a:lstStyle/>
+                    <a:p>
+                      <a:pPr algn="ctr"/>
+                      <a:r>
+                        <a:rPr sz="1100" b="0">
+                          <a:solidFill>
+                            <a:srgbClr val="222222"/>
+                          </a:solidFill>
+                          <a:latin typeface="Calibri"/>
+                        </a:rPr>
+                        <a:t>~0.87</a:t>
+                      </a:r>
+                    </a:p>
+                  </a:txBody>
+                  <a:tcPr marL="90000" marR="90000" marT="18000" marB="18000">
+                    <a:solidFill>
+                      <a:srgbClr val="FFFFFF"/>
+                    </a:solidFill>
+                  </a:tcPr>
+                </a:tc>
+              </a:tr>
+            </a:tbl>
+          </a:graphicData>
+        </a:graphic>
+      </p:graphicFrame>
+      <p:sp>
+        <p:nvSpPr>
+          <p:cNvPr id="8" name="Rounded Rectangle 7"/>
           <p:cNvSpPr/>
           <p:nvPr/>
         </p:nvSpPr>
         <p:spPr>
           <a:xfrm>
-            <a:off x="700000" y="1650000"/>
+            <a:off x="700000" y="4550000"/>
             <a:ext cx="10800000" cy="650000"/>
           </a:xfrm>
           <a:prstGeom prst="roundRect">
@@ -6520,7 +7113,7 @@
           </a:solidFill>
           <a:ln w="19050">
             <a:solidFill>
-              <a:srgbClr val="1C3087"/>
+              <a:srgbClr val="C68136"/>
             </a:solidFill>
           </a:ln>
           <a:effectLst/>
@@ -6547,24 +7140,24 @@
             <a:r>
               <a:rPr sz="1400" b="1">
                 <a:solidFill>
-                  <a:srgbClr val="1C3087"/>
+                  <a:srgbClr val="C68136"/>
                 </a:solidFill>
               </a:rPr>
-              <a:t>round8_distress_fix_scale083.csv</a:t>
-            </a:r>
-          </a:p>
-        </p:txBody>
-      </p:sp>
-      <p:sp>
-        <p:nvSpPr>
-          <p:cNvPr id="7" name="TextBox 6"/>
+              <a:t>Local: 0.83 plano = 9.95%  →  Edge = 10.22%  ·  Practice real: Edge 31.01% vs campeon 32.72% (queda por debajo)</a:t>
+            </a:r>
+          </a:p>
+        </p:txBody>
+      </p:sp>
+      <p:sp>
+        <p:nvSpPr>
+          <p:cNvPr id="9" name="TextBox 8"/>
           <p:cNvSpPr txBox="1"/>
           <p:nvPr/>
         </p:nvSpPr>
         <p:spPr>
           <a:xfrm>
-            <a:off x="700000" y="2500000"/>
-            <a:ext cx="10800000" cy="1400000"/>
+            <a:off x="700000" y="5300000"/>
+            <a:ext cx="10800000" cy="900000"/>
           </a:xfrm>
           <a:prstGeom prst="rect">
             <a:avLst/>
@@ -6586,120 +7179,13 @@
               </a:spcAft>
             </a:pPr>
             <a:r>
-              <a:rPr sz="1600">
+              <a:rPr sz="1300">
                 <a:solidFill>
-                  <a:srgbClr val="222222"/>
+                  <a:srgbClr val="5B5B5B"/>
                 </a:solidFill>
                 <a:latin typeface="Calibri"/>
               </a:rPr>
-              <a:t>Es el modelo de Ronda 8 (tabular + imagenes CLIP + fix quirurgico de propiedades distressed confirmadas) con todas las predicciones escaladas x0.83. Es la combinacion que mejor Mean ROI mostro de forma consistente en validaciones repetidas, tanto en simulacion local como en el dashboard real de Practice.</a:t>
-            </a:r>
-          </a:p>
-        </p:txBody>
-      </p:sp>
-      <p:sp>
-        <p:nvSpPr>
-          <p:cNvPr id="8" name="TextBox 7"/>
-          <p:cNvSpPr txBox="1"/>
-          <p:nvPr/>
-        </p:nvSpPr>
-        <p:spPr>
-          <a:xfrm>
-            <a:off x="700000" y="4200000"/>
-            <a:ext cx="10800000" cy="1800000"/>
-          </a:xfrm>
-          <a:prstGeom prst="rect">
-            <a:avLst/>
-          </a:prstGeom>
-          <a:noFill/>
-        </p:spPr>
-        <p:txBody>
-          <a:bodyPr wrap="square">
-            <a:spAutoFit/>
-          </a:bodyPr>
-          <a:lstStyle/>
-          <a:p>
-            <a:pPr>
-              <a:lnSpc>
-                <a:spcPct val="115000"/>
-              </a:lnSpc>
-              <a:spcAft>
-                <a:spcPts val="1400"/>
-              </a:spcAft>
-            </a:pPr>
-            <a:r>
-              <a:rPr sz="1500" b="1">
-                <a:solidFill>
-                  <a:srgbClr val="C68136"/>
-                </a:solidFill>
-                <a:latin typeface="Calibri"/>
-              </a:rPr>
-              <a:t>▸  </a:t>
-            </a:r>
-            <a:r>
-              <a:rPr sz="1500">
-                <a:solidFill>
-                  <a:srgbClr val="222222"/>
-                </a:solidFill>
-                <a:latin typeface="Calibri"/>
-              </a:rPr>
-              <a:t>Rondas 1 a 8: evolucion incremental, validada en Practice en cada paso.</a:t>
-            </a:r>
-          </a:p>
-          <a:p>
-            <a:pPr>
-              <a:lnSpc>
-                <a:spcPct val="115000"/>
-              </a:lnSpc>
-              <a:spcAft>
-                <a:spcPts val="1400"/>
-              </a:spcAft>
-            </a:pPr>
-            <a:r>
-              <a:rPr sz="1500" b="1">
-                <a:solidFill>
-                  <a:srgbClr val="C68136"/>
-                </a:solidFill>
-                <a:latin typeface="Calibri"/>
-              </a:rPr>
-              <a:t>▸  </a:t>
-            </a:r>
-            <a:r>
-              <a:rPr sz="1500">
-                <a:solidFill>
-                  <a:srgbClr val="222222"/>
-                </a:solidFill>
-                <a:latin typeface="Calibri"/>
-              </a:rPr>
-              <a:t>Ronda 9 (texto/LLM): pausada, no aporta con la cobertura/calidad actual.</a:t>
-            </a:r>
-          </a:p>
-          <a:p>
-            <a:pPr>
-              <a:lnSpc>
-                <a:spcPct val="115000"/>
-              </a:lnSpc>
-              <a:spcAft>
-                <a:spcPts val="1400"/>
-              </a:spcAft>
-            </a:pPr>
-            <a:r>
-              <a:rPr sz="1500" b="1">
-                <a:solidFill>
-                  <a:srgbClr val="C68136"/>
-                </a:solidFill>
-                <a:latin typeface="Calibri"/>
-              </a:rPr>
-              <a:t>▸  </a:t>
-            </a:r>
-            <a:r>
-              <a:rPr sz="1500">
-                <a:solidFill>
-                  <a:srgbClr val="222222"/>
-                </a:solidFill>
-                <a:latin typeface="Calibri"/>
-              </a:rPr>
-              <a:t>Calibracion de escala: la mejora final, grande y reproducible.</a:t>
+              <a:t>El tercil 'alto' de precio siempre tiene mas edge que el 'bajo', en los 3 segmentos. Real, pero en Practice la mayor selectividad (menos volumen) no alcanzo para superar al campeon.</a:t>
             </a:r>
           </a:p>
         </p:txBody>
@@ -6722,9 +7208,53 @@
         <p:nvPr/>
       </p:nvGrpSpPr>
       <p:grpSpPr/>
+      <p:sp>
+        <p:nvSpPr>
+          <p:cNvPr id="2" name="Right Triangle 1"/>
+          <p:cNvSpPr/>
+          <p:nvPr/>
+        </p:nvSpPr>
+        <p:spPr>
+          <a:xfrm rot="10800000">
+            <a:off x="9666111" y="-98779"/>
+            <a:ext cx="2596444" cy="2413000"/>
+          </a:xfrm>
+          <a:prstGeom prst="rtTriangle">
+            <a:avLst/>
+          </a:prstGeom>
+          <a:solidFill>
+            <a:srgbClr val="DB5B7D"/>
+          </a:solidFill>
+          <a:ln>
+            <a:noFill/>
+          </a:ln>
+          <a:effectLst/>
+        </p:spPr>
+        <p:style>
+          <a:lnRef idx="1">
+            <a:schemeClr val="accent1"/>
+          </a:lnRef>
+          <a:fillRef idx="3">
+            <a:schemeClr val="accent1"/>
+          </a:fillRef>
+          <a:effectRef idx="2">
+            <a:schemeClr val="accent1"/>
+          </a:effectRef>
+          <a:fontRef idx="minor">
+            <a:schemeClr val="lt1"/>
+          </a:fontRef>
+        </p:style>
+        <p:txBody>
+          <a:bodyPr rtlCol="0" anchor="ctr"/>
+          <a:lstStyle/>
+          <a:p>
+            <a:pPr algn="ctr"/>
+          </a:p>
+        </p:txBody>
+      </p:sp>
       <p:pic>
         <p:nvPicPr>
-          <p:cNvPr id="2" name="Picture 1" descr="austral_closing_bg.jpg"/>
+          <p:cNvPr id="3" name="Picture 2" descr="austral_logo.jpeg"/>
           <p:cNvPicPr>
             <a:picLocks noChangeAspect="1"/>
           </p:cNvPicPr>
@@ -6738,8 +7268,8 @@
         </p:blipFill>
         <p:spPr>
           <a:xfrm>
-            <a:off x="0" y="0"/>
-            <a:ext cx="12192000" cy="6858000"/>
+            <a:off x="300000" y="5550000"/>
+            <a:ext cx="1746504" cy="1170432"/>
           </a:xfrm>
           <a:prstGeom prst="rect">
             <a:avLst/>
@@ -6748,14 +7278,14 @@
       </p:pic>
       <p:sp>
         <p:nvSpPr>
-          <p:cNvPr id="3" name="TextBox 2"/>
+          <p:cNvPr id="4" name="TextBox 3"/>
           <p:cNvSpPr txBox="1"/>
           <p:nvPr/>
         </p:nvSpPr>
         <p:spPr>
           <a:xfrm>
-            <a:off x="700000" y="3000000"/>
-            <a:ext cx="6000000" cy="900000"/>
+            <a:off x="700000" y="200000"/>
+            <a:ext cx="6000000" cy="280000"/>
           </a:xfrm>
           <a:prstGeom prst="rect">
             <a:avLst/>
@@ -6769,12 +7299,250 @@
           <a:lstStyle/>
           <a:p>
             <a:r>
-              <a:rPr sz="3600" b="1">
+              <a:rPr sz="1300" b="1">
+                <a:solidFill>
+                  <a:srgbClr val="C68136"/>
+                </a:solidFill>
+                <a:latin typeface="Calibri"/>
+              </a:rPr>
+              <a:t>RECOMENDACION FINAL</a:t>
+            </a:r>
+          </a:p>
+        </p:txBody>
+      </p:sp>
+      <p:sp>
+        <p:nvSpPr>
+          <p:cNvPr id="5" name="TextBox 4"/>
+          <p:cNvSpPr txBox="1"/>
+          <p:nvPr/>
+        </p:nvSpPr>
+        <p:spPr>
+          <a:xfrm>
+            <a:off x="700000" y="430000"/>
+            <a:ext cx="10800000" cy="650000"/>
+          </a:xfrm>
+          <a:prstGeom prst="rect">
+            <a:avLst/>
+          </a:prstGeom>
+          <a:noFill/>
+        </p:spPr>
+        <p:txBody>
+          <a:bodyPr wrap="square">
+            <a:spAutoFit/>
+          </a:bodyPr>
+          <a:lstStyle/>
+          <a:p>
+            <a:r>
+              <a:rPr sz="3000" b="1">
+                <a:solidFill>
+                  <a:srgbClr val="1C3087"/>
+                </a:solidFill>
+                <a:latin typeface="Calibri"/>
+              </a:rPr>
+              <a:t>Modelo elegido para la presentacion final</a:t>
+            </a:r>
+          </a:p>
+        </p:txBody>
+      </p:sp>
+      <p:sp>
+        <p:nvSpPr>
+          <p:cNvPr id="6" name="Rounded Rectangle 5"/>
+          <p:cNvSpPr/>
+          <p:nvPr/>
+        </p:nvSpPr>
+        <p:spPr>
+          <a:xfrm>
+            <a:off x="700000" y="1650000"/>
+            <a:ext cx="10800000" cy="650000"/>
+          </a:xfrm>
+          <a:prstGeom prst="roundRect">
+            <a:avLst/>
+          </a:prstGeom>
+          <a:solidFill>
+            <a:srgbClr val="FFFFFF"/>
+          </a:solidFill>
+          <a:ln w="19050">
+            <a:solidFill>
+              <a:srgbClr val="1C3087"/>
+            </a:solidFill>
+          </a:ln>
+          <a:effectLst/>
+        </p:spPr>
+        <p:style>
+          <a:lnRef idx="1">
+            <a:schemeClr val="accent1"/>
+          </a:lnRef>
+          <a:fillRef idx="3">
+            <a:schemeClr val="accent1"/>
+          </a:fillRef>
+          <a:effectRef idx="2">
+            <a:schemeClr val="accent1"/>
+          </a:effectRef>
+          <a:fontRef idx="minor">
+            <a:schemeClr val="lt1"/>
+          </a:fontRef>
+        </p:style>
+        <p:txBody>
+          <a:bodyPr rtlCol="0" anchor="ctr" wrap="square" lIns="180000"/>
+          <a:lstStyle/>
+          <a:p>
+            <a:pPr algn="ctr"/>
+            <a:r>
+              <a:rPr sz="1400" b="1">
                 <a:solidFill>
                   <a:srgbClr val="1C3087"/>
                 </a:solidFill>
               </a:rPr>
-              <a:t>MUCHAS GRACIAS</a:t>
+              <a:t>round8_distress_fix_scale083.csv</a:t>
+            </a:r>
+          </a:p>
+        </p:txBody>
+      </p:sp>
+      <p:sp>
+        <p:nvSpPr>
+          <p:cNvPr id="7" name="TextBox 6"/>
+          <p:cNvSpPr txBox="1"/>
+          <p:nvPr/>
+        </p:nvSpPr>
+        <p:spPr>
+          <a:xfrm>
+            <a:off x="700000" y="2500000"/>
+            <a:ext cx="10800000" cy="1600000"/>
+          </a:xfrm>
+          <a:prstGeom prst="rect">
+            <a:avLst/>
+          </a:prstGeom>
+          <a:noFill/>
+        </p:spPr>
+        <p:txBody>
+          <a:bodyPr wrap="square">
+            <a:spAutoFit/>
+          </a:bodyPr>
+          <a:lstStyle/>
+          <a:p>
+            <a:pPr>
+              <a:lnSpc>
+                <a:spcPct val="120000"/>
+              </a:lnSpc>
+              <a:spcAft>
+                <a:spcPts val="1200"/>
+              </a:spcAft>
+            </a:pPr>
+            <a:r>
+              <a:rPr sz="1550">
+                <a:solidFill>
+                  <a:srgbClr val="222222"/>
+                </a:solidFill>
+                <a:latin typeface="Calibri"/>
+              </a:rPr>
+              <a:t>Es el modelo de Ronda 8 (tabular + imagenes CLIP + fix quirurgico de propiedades distressed) con todas las predicciones escaladas x0.83. Se probaron dos refinamientos mas finos para tratar de superarlo (Kelly por segmento y Edge por segmento x precio, secciones 6 y 7): ninguno le gano de forma clara en el dashboard real de Practice. La escala 0.83 queda confirmada como la mejor opcion disponible.</a:t>
+            </a:r>
+          </a:p>
+        </p:txBody>
+      </p:sp>
+      <p:sp>
+        <p:nvSpPr>
+          <p:cNvPr id="8" name="TextBox 7"/>
+          <p:cNvSpPr txBox="1"/>
+          <p:nvPr/>
+        </p:nvSpPr>
+        <p:spPr>
+          <a:xfrm>
+            <a:off x="700000" y="4500000"/>
+            <a:ext cx="10800000" cy="1800000"/>
+          </a:xfrm>
+          <a:prstGeom prst="rect">
+            <a:avLst/>
+          </a:prstGeom>
+          <a:noFill/>
+        </p:spPr>
+        <p:txBody>
+          <a:bodyPr wrap="square">
+            <a:spAutoFit/>
+          </a:bodyPr>
+          <a:lstStyle/>
+          <a:p>
+            <a:pPr>
+              <a:lnSpc>
+                <a:spcPct val="115000"/>
+              </a:lnSpc>
+              <a:spcAft>
+                <a:spcPts val="1400"/>
+              </a:spcAft>
+            </a:pPr>
+            <a:r>
+              <a:rPr sz="1450" b="1">
+                <a:solidFill>
+                  <a:srgbClr val="C68136"/>
+                </a:solidFill>
+                <a:latin typeface="Calibri"/>
+              </a:rPr>
+              <a:t>▸  </a:t>
+            </a:r>
+            <a:r>
+              <a:rPr sz="1450">
+                <a:solidFill>
+                  <a:srgbClr val="222222"/>
+                </a:solidFill>
+                <a:latin typeface="Calibri"/>
+              </a:rPr>
+              <a:t>Rondas 1 a 8: evolucion incremental, validada en Practice en cada paso.</a:t>
+            </a:r>
+          </a:p>
+          <a:p>
+            <a:pPr>
+              <a:lnSpc>
+                <a:spcPct val="115000"/>
+              </a:lnSpc>
+              <a:spcAft>
+                <a:spcPts val="1400"/>
+              </a:spcAft>
+            </a:pPr>
+            <a:r>
+              <a:rPr sz="1450" b="1">
+                <a:solidFill>
+                  <a:srgbClr val="C68136"/>
+                </a:solidFill>
+                <a:latin typeface="Calibri"/>
+              </a:rPr>
+              <a:t>▸  </a:t>
+            </a:r>
+            <a:r>
+              <a:rPr sz="1450">
+                <a:solidFill>
+                  <a:srgbClr val="222222"/>
+                </a:solidFill>
+                <a:latin typeface="Calibri"/>
+              </a:rPr>
+              <a:t>Ronda 9 (texto/LLM): pausada, no aporta con la cobertura/calidad actual.</a:t>
+            </a:r>
+          </a:p>
+          <a:p>
+            <a:pPr>
+              <a:lnSpc>
+                <a:spcPct val="115000"/>
+              </a:lnSpc>
+              <a:spcAft>
+                <a:spcPts val="1400"/>
+              </a:spcAft>
+            </a:pPr>
+            <a:r>
+              <a:rPr sz="1450" b="1">
+                <a:solidFill>
+                  <a:srgbClr val="C68136"/>
+                </a:solidFill>
+                <a:latin typeface="Calibri"/>
+              </a:rPr>
+              <a:t>▸  </a:t>
+            </a:r>
+            <a:r>
+              <a:rPr sz="1450">
+                <a:solidFill>
+                  <a:srgbClr val="222222"/>
+                </a:solidFill>
+                <a:latin typeface="Calibri"/>
+              </a:rPr>
+              <a:t>Kelly y Edge: probados a fondo, ninguno le gano al campeon — se cierra la busqueda de mejoras con la escala 0.83 confirmada.</a:t>
             </a:r>
           </a:p>
         </p:txBody>

--- a/reports/resumen_proyecto_SAM.pptx
+++ b/reports/resumen_proyecto_SAM.pptx
@@ -3680,7 +3680,7 @@
                 </a:solidFill>
                 <a:latin typeface="Calibri"/>
               </a:rPr>
-              <a:t>Cada propiedad tiene un precio de oferta (asking price) generado al azar alrededor del valor real: asking = valor_real x (1 + Normal(-7%, 35%)).</a:t>
+              <a:t>Cada propiedad tiene un precio de oferta (asking price) generado al azar con una distribucion normal (gaussiana), media -7% y desvio 35%: asking = valor_real x (1 + Normal(-7%, 35%)). En criollo: el asking suele salir un poco por debajo del valor real, pero con mucha variacion — a veces sale muy bajo, a veces muy alto.</a:t>
             </a:r>
           </a:p>
           <a:p>
@@ -3736,7 +3736,7 @@
                 </a:solidFill>
                 <a:latin typeface="Calibri"/>
               </a:rPr>
-              <a:t>Si compramos, ofertamos pred x 0.85 en una subasta Vickrey: gana el mayor postor pero paga el precio del segundo postor.</a:t>
+              <a:t>Si compramos, ofertamos pred x 0.85 en una subasta Vickrey (gana el mayor postor pero paga el precio del segundo postor). Ese x0.85 es una regla fija de la competencia, no algo que ajustamos nosotros — lo que si calibramos es la prediccion que entra a esa formula (alpha, escala).</a:t>
             </a:r>
           </a:p>
           <a:p>
@@ -5989,7 +5989,7 @@
                 </a:solidFill>
                 <a:latin typeface="Calibri"/>
               </a:rPr>
-              <a:t>Kelly clasico asume perder = perder toda la apuesta. Acá no: si nos ganan la subasta, no perdemos nada. Lo adaptamos a p = Hit Rate, W = ganancia y L = perdida (como fraccion del costo), condicionado a ganar la subasta:  f* = p/L − q/W</a:t>
+              <a:t>En criollo: pensa 3 mesas de casino, una por segmento. En cada una sabemos que tan seguido ganamos (Hit Rate) y cuanto ganamos/perdemos cuando pasa — Kelly usa esos datos para decidir donde apostar mas fuerte y donde mas flojo (formula: f* = p/L − q/W).</a:t>
             </a:r>
           </a:p>
         </p:txBody>
@@ -6489,7 +6489,7 @@
                 </a:solidFill>
                 <a:latin typeface="Calibri"/>
               </a:rPr>
-              <a:t>Los 3 segmentos tienen perfil de riesgo parecido, asi que Kelly confirma que la escala plana ya estaba cerca del optimo — sin gran diferenciacion.</a:t>
+              <a:t>Las 3 mesas salieron casi iguales — Kelly confirma que la escala plana ya estaba cerca del optimo, sin gran diferenciacion entre segmentos.</a:t>
             </a:r>
           </a:p>
         </p:txBody>
@@ -6685,7 +6685,7 @@
                 </a:solidFill>
                 <a:latin typeface="Calibri"/>
               </a:rPr>
-              <a:t>EV = P(ganar) x (valor_real − costo pagado). Kelly ya midio esto por segmento y no encontro diferencia. Cortando mas fino — segmento x tercil de precio predicho — SI aparece un patron real y consistente.</a:t>
+              <a:t>En criollo: Kelly separo en 3 mesas por segmento y no vio diferencias. Edge parte cada mesa en otras 3 segun que tan cara es la propiedad DENTRO de su propio segmento (barata/media/cara) — 9 mesas en total.</a:t>
             </a:r>
           </a:p>
         </p:txBody>

--- a/reports/resumen_proyecto_SAM.pptx
+++ b/reports/resumen_proyecto_SAM.pptx
@@ -5640,9 +5640,119 @@
           </a:p>
         </p:txBody>
       </p:sp>
+      <p:sp>
+        <p:nvSpPr>
+          <p:cNvPr id="3" name="TextBox 2"/>
+          <p:cNvSpPr txBox="1"/>
+          <p:nvPr/>
+        </p:nvSpPr>
+        <p:spPr>
+          <a:xfrm>
+            <a:off x="700000" y="200000"/>
+            <a:ext cx="6000000" cy="280000"/>
+          </a:xfrm>
+          <a:prstGeom prst="rect">
+            <a:avLst/>
+          </a:prstGeom>
+          <a:noFill/>
+        </p:spPr>
+        <p:txBody>
+          <a:bodyPr wrap="none">
+            <a:spAutoFit/>
+          </a:bodyPr>
+          <a:lstStyle/>
+          <a:p>
+            <a:r>
+              <a:rPr sz="1300" b="1">
+                <a:solidFill>
+                  <a:srgbClr val="C68136"/>
+                </a:solidFill>
+                <a:latin typeface="Calibri"/>
+              </a:rPr>
+              <a:t>LA MEJORA FINAL</a:t>
+            </a:r>
+          </a:p>
+        </p:txBody>
+      </p:sp>
+      <p:sp>
+        <p:nvSpPr>
+          <p:cNvPr id="4" name="TextBox 3"/>
+          <p:cNvSpPr txBox="1"/>
+          <p:nvPr/>
+        </p:nvSpPr>
+        <p:spPr>
+          <a:xfrm>
+            <a:off x="700000" y="430000"/>
+            <a:ext cx="10800000" cy="650000"/>
+          </a:xfrm>
+          <a:prstGeom prst="rect">
+            <a:avLst/>
+          </a:prstGeom>
+          <a:noFill/>
+        </p:spPr>
+        <p:txBody>
+          <a:bodyPr wrap="square">
+            <a:spAutoFit/>
+          </a:bodyPr>
+          <a:lstStyle/>
+          <a:p>
+            <a:r>
+              <a:rPr sz="3000" b="1">
+                <a:solidFill>
+                  <a:srgbClr val="1C3087"/>
+                </a:solidFill>
+                <a:latin typeface="Calibri"/>
+              </a:rPr>
+              <a:t>Calibracion de escala sobre Ronda 8</a:t>
+            </a:r>
+          </a:p>
+        </p:txBody>
+      </p:sp>
+      <p:sp>
+        <p:nvSpPr>
+          <p:cNvPr id="5" name="TextBox 4"/>
+          <p:cNvSpPr txBox="1"/>
+          <p:nvPr/>
+        </p:nvSpPr>
+        <p:spPr>
+          <a:xfrm>
+            <a:off x="700000" y="1150000"/>
+            <a:ext cx="10800000" cy="500000"/>
+          </a:xfrm>
+          <a:prstGeom prst="rect">
+            <a:avLst/>
+          </a:prstGeom>
+          <a:noFill/>
+        </p:spPr>
+        <p:txBody>
+          <a:bodyPr wrap="square">
+            <a:spAutoFit/>
+          </a:bodyPr>
+          <a:lstStyle/>
+          <a:p>
+            <a:pPr>
+              <a:lnSpc>
+                <a:spcPct val="120000"/>
+              </a:lnSpc>
+              <a:spcAft>
+                <a:spcPts val="1200"/>
+              </a:spcAft>
+            </a:pPr>
+            <a:r>
+              <a:rPr sz="1200">
+                <a:solidFill>
+                  <a:srgbClr val="5B5B5B"/>
+                </a:solidFill>
+                <a:latin typeface="Calibri"/>
+              </a:rPr>
+              <a:t>Ojo: en el grafico, 0.85 parece ganarle a 0.83 — pero es una simulacion casera aproximada, no la fuente de verdad (ver por que abajo).</a:t>
+            </a:r>
+          </a:p>
+        </p:txBody>
+      </p:sp>
       <p:pic>
         <p:nvPicPr>
-          <p:cNvPr id="3" name="Picture 2" descr="austral_logo.jpeg"/>
+          <p:cNvPr id="6" name="Picture 5" descr="chart_scale_sweep.png"/>
           <p:cNvPicPr>
             <a:picLocks noChangeAspect="1"/>
           </p:cNvPicPr>
@@ -5656,8 +5766,8 @@
         </p:blipFill>
         <p:spPr>
           <a:xfrm>
-            <a:off x="300000" y="5550000"/>
-            <a:ext cx="1746504" cy="1170432"/>
+            <a:off x="1700000" y="1650000"/>
+            <a:ext cx="8800000" cy="4261053"/>
           </a:xfrm>
           <a:prstGeom prst="rect">
             <a:avLst/>
@@ -5666,106 +5776,14 @@
       </p:pic>
       <p:sp>
         <p:nvSpPr>
-          <p:cNvPr id="4" name="TextBox 3"/>
-          <p:cNvSpPr txBox="1"/>
-          <p:nvPr/>
-        </p:nvSpPr>
-        <p:spPr>
-          <a:xfrm>
-            <a:off x="700000" y="200000"/>
-            <a:ext cx="6000000" cy="280000"/>
-          </a:xfrm>
-          <a:prstGeom prst="rect">
-            <a:avLst/>
-          </a:prstGeom>
-          <a:noFill/>
-        </p:spPr>
-        <p:txBody>
-          <a:bodyPr wrap="none">
-            <a:spAutoFit/>
-          </a:bodyPr>
-          <a:lstStyle/>
-          <a:p>
-            <a:r>
-              <a:rPr sz="1300" b="1">
-                <a:solidFill>
-                  <a:srgbClr val="C68136"/>
-                </a:solidFill>
-                <a:latin typeface="Calibri"/>
-              </a:rPr>
-              <a:t>LA MEJORA FINAL</a:t>
-            </a:r>
-          </a:p>
-        </p:txBody>
-      </p:sp>
-      <p:sp>
-        <p:nvSpPr>
-          <p:cNvPr id="5" name="TextBox 4"/>
-          <p:cNvSpPr txBox="1"/>
-          <p:nvPr/>
-        </p:nvSpPr>
-        <p:spPr>
-          <a:xfrm>
-            <a:off x="700000" y="430000"/>
-            <a:ext cx="10800000" cy="650000"/>
-          </a:xfrm>
-          <a:prstGeom prst="rect">
-            <a:avLst/>
-          </a:prstGeom>
-          <a:noFill/>
-        </p:spPr>
-        <p:txBody>
-          <a:bodyPr wrap="square">
-            <a:spAutoFit/>
-          </a:bodyPr>
-          <a:lstStyle/>
-          <a:p>
-            <a:r>
-              <a:rPr sz="3000" b="1">
-                <a:solidFill>
-                  <a:srgbClr val="1C3087"/>
-                </a:solidFill>
-                <a:latin typeface="Calibri"/>
-              </a:rPr>
-              <a:t>Calibracion de escala sobre Ronda 8</a:t>
-            </a:r>
-          </a:p>
-        </p:txBody>
-      </p:sp>
-      <p:pic>
-        <p:nvPicPr>
-          <p:cNvPr id="6" name="Picture 5" descr="chart_scale_sweep.png"/>
-          <p:cNvPicPr>
-            <a:picLocks noChangeAspect="1"/>
-          </p:cNvPicPr>
-          <p:nvPr/>
-        </p:nvPicPr>
-        <p:blipFill>
-          <a:blip r:embed="rId3"/>
-          <a:stretch>
-            <a:fillRect/>
-          </a:stretch>
-        </p:blipFill>
-        <p:spPr>
-          <a:xfrm>
-            <a:off x="1350000" y="1500000"/>
-            <a:ext cx="9600000" cy="4648421"/>
-          </a:xfrm>
-          <a:prstGeom prst="rect">
-            <a:avLst/>
-          </a:prstGeom>
-        </p:spPr>
-      </p:pic>
-      <p:sp>
-        <p:nvSpPr>
           <p:cNvPr id="7" name="TextBox 6"/>
           <p:cNvSpPr txBox="1"/>
           <p:nvPr/>
         </p:nvSpPr>
         <p:spPr>
           <a:xfrm>
-            <a:off x="700000" y="6000000"/>
-            <a:ext cx="10800000" cy="800000"/>
+            <a:off x="700000" y="6150000"/>
+            <a:ext cx="10800000" cy="650000"/>
           </a:xfrm>
           <a:prstGeom prst="rect">
             <a:avLst/>
@@ -5787,13 +5805,13 @@
               </a:spcAft>
             </a:pPr>
             <a:r>
-              <a:rPr sz="1400">
+              <a:rPr sz="1300">
                 <a:solidFill>
                   <a:srgbClr val="222222"/>
                 </a:solidFill>
                 <a:latin typeface="Calibri"/>
               </a:rPr>
-              <a:t>Validado con 3 corridas independientes en el dashboard real: escala 0.83 le gano a Ronda 8 sin escalar por 2x a 4x en Mean ROI, sin excepciones.</a:t>
+              <a:t>Validado de verdad con 3 corridas independientes en el dashboard real: ahi escala 0.83 le gano a 0.85 y a Ronda 8 sin escalar, por 2x a 4x en Mean ROI, sin excepciones.</a:t>
             </a:r>
           </a:p>
         </p:txBody>

--- a/reports/resumen_proyecto_SAM.pptx
+++ b/reports/resumen_proyecto_SAM.pptx
@@ -5,18 +5,18 @@
     <p:sldMasterId id="2147483648" r:id="rId1"/>
   </p:sldMasterIdLst>
   <p:sldIdLst>
-    <p:sldId id="256" r:id="rId7"/>
-    <p:sldId id="257" r:id="rId8"/>
-    <p:sldId id="258" r:id="rId9"/>
-    <p:sldId id="259" r:id="rId10"/>
-    <p:sldId id="260" r:id="rId11"/>
-    <p:sldId id="261" r:id="rId12"/>
-    <p:sldId id="262" r:id="rId13"/>
-    <p:sldId id="263" r:id="rId14"/>
-    <p:sldId id="264" r:id="rId15"/>
-    <p:sldId id="265" r:id="rId16"/>
+    <p:sldId id="256" r:id="rId2"/>
+    <p:sldId id="257" r:id="rId3"/>
+    <p:sldId id="258" r:id="rId4"/>
+    <p:sldId id="259" r:id="rId5"/>
+    <p:sldId id="260" r:id="rId6"/>
+    <p:sldId id="261" r:id="rId7"/>
+    <p:sldId id="262" r:id="rId8"/>
+    <p:sldId id="263" r:id="rId9"/>
+    <p:sldId id="264" r:id="rId10"/>
+    <p:sldId id="265" r:id="rId11"/>
   </p:sldIdLst>
-  <p:sldSz cx="12192000" cy="6858000" type="screen4x3"/>
+  <p:sldSz cx="12192000" cy="6858000"/>
   <p:notesSz cx="6858000" cy="9144000"/>
   <p:defaultTextStyle>
     <a:defPPr>
@@ -113,6 +113,22 @@
       </a:defRPr>
     </a:lvl9pPr>
   </p:defaultTextStyle>
+  <p:extLst>
+    <p:ext uri="{EFAFB233-063F-42B5-8137-9DF3F51BA10A}">
+      <p15:sldGuideLst xmlns:p15="http://schemas.microsoft.com/office/powerpoint/2012/main">
+        <p15:guide id="1" orient="horz" pos="2160">
+          <p15:clr>
+            <a:srgbClr val="A4A3A4"/>
+          </p15:clr>
+        </p15:guide>
+        <p15:guide id="2" pos="2880">
+          <p15:clr>
+            <a:srgbClr val="A4A3A4"/>
+          </p15:clr>
+        </p15:guide>
+      </p15:sldGuideLst>
+    </p:ext>
+  </p:extLst>
 </p:presentation>
 </file>
 
@@ -154,10 +170,9 @@
           <a:lstStyle/>
           <a:p>
             <a:r>
-              <a:rPr lang="en-US" smtClean="0"/>
+              <a:rPr lang="en-US"/>
               <a:t>Click to edit Master title style</a:t>
             </a:r>
-            <a:endParaRPr lang="en-US"/>
           </a:p>
         </p:txBody>
       </p:sp>
@@ -273,10 +288,9 @@
           </a:lstStyle>
           <a:p>
             <a:r>
-              <a:rPr lang="en-US" smtClean="0"/>
+              <a:rPr lang="en-US"/>
               <a:t>Click to edit Master subtitle style</a:t>
             </a:r>
-            <a:endParaRPr lang="en-US"/>
           </a:p>
         </p:txBody>
       </p:sp>
@@ -297,7 +311,7 @@
           <a:p>
             <a:fld id="{5BCAD085-E8A6-8845-BD4E-CB4CCA059FC4}" type="datetimeFigureOut">
               <a:rPr lang="en-US" smtClean="0"/>
-              <a:t>1/27/13</a:t>
+              <a:t>8/4/2026</a:t>
             </a:fld>
             <a:endParaRPr lang="en-US"/>
           </a:p>
@@ -339,7 +353,7 @@
           <a:p>
             <a:fld id="{C1FF6DA9-008F-8B48-92A6-B652298478BF}" type="slidenum">
               <a:rPr lang="en-US" smtClean="0"/>
-              <a:t>‹#›</a:t>
+              <a:t>‹Nº›</a:t>
             </a:fld>
             <a:endParaRPr lang="en-US"/>
           </a:p>
@@ -391,10 +405,9 @@
           <a:lstStyle/>
           <a:p>
             <a:r>
-              <a:rPr lang="en-US" smtClean="0"/>
+              <a:rPr lang="en-US"/>
               <a:t>Click to edit Master title style</a:t>
             </a:r>
-            <a:endParaRPr lang="en-US"/>
           </a:p>
         </p:txBody>
       </p:sp>
@@ -415,38 +428,37 @@
           <a:p>
             <a:pPr lvl="0"/>
             <a:r>
-              <a:rPr lang="en-US" smtClean="0"/>
+              <a:rPr lang="en-US"/>
               <a:t>Click to edit Master text styles</a:t>
             </a:r>
           </a:p>
           <a:p>
             <a:pPr lvl="1"/>
             <a:r>
-              <a:rPr lang="en-US" smtClean="0"/>
+              <a:rPr lang="en-US"/>
               <a:t>Second level</a:t>
             </a:r>
           </a:p>
           <a:p>
             <a:pPr lvl="2"/>
             <a:r>
-              <a:rPr lang="en-US" smtClean="0"/>
+              <a:rPr lang="en-US"/>
               <a:t>Third level</a:t>
             </a:r>
           </a:p>
           <a:p>
             <a:pPr lvl="3"/>
             <a:r>
-              <a:rPr lang="en-US" smtClean="0"/>
+              <a:rPr lang="en-US"/>
               <a:t>Fourth level</a:t>
             </a:r>
           </a:p>
           <a:p>
             <a:pPr lvl="4"/>
             <a:r>
-              <a:rPr lang="en-US" smtClean="0"/>
+              <a:rPr lang="en-US"/>
               <a:t>Fifth level</a:t>
             </a:r>
-            <a:endParaRPr lang="en-US"/>
           </a:p>
         </p:txBody>
       </p:sp>
@@ -467,7 +479,7 @@
           <a:p>
             <a:fld id="{5BCAD085-E8A6-8845-BD4E-CB4CCA059FC4}" type="datetimeFigureOut">
               <a:rPr lang="en-US" smtClean="0"/>
-              <a:t>1/27/13</a:t>
+              <a:t>8/4/2026</a:t>
             </a:fld>
             <a:endParaRPr lang="en-US"/>
           </a:p>
@@ -509,7 +521,7 @@
           <a:p>
             <a:fld id="{C1FF6DA9-008F-8B48-92A6-B652298478BF}" type="slidenum">
               <a:rPr lang="en-US" smtClean="0"/>
-              <a:t>‹#›</a:t>
+              <a:t>‹Nº›</a:t>
             </a:fld>
             <a:endParaRPr lang="en-US"/>
           </a:p>
@@ -566,10 +578,9 @@
           <a:lstStyle/>
           <a:p>
             <a:r>
-              <a:rPr lang="en-US" smtClean="0"/>
+              <a:rPr lang="en-US"/>
               <a:t>Click to edit Master title style</a:t>
             </a:r>
-            <a:endParaRPr lang="en-US"/>
           </a:p>
         </p:txBody>
       </p:sp>
@@ -595,38 +606,37 @@
           <a:p>
             <a:pPr lvl="0"/>
             <a:r>
-              <a:rPr lang="en-US" smtClean="0"/>
+              <a:rPr lang="en-US"/>
               <a:t>Click to edit Master text styles</a:t>
             </a:r>
           </a:p>
           <a:p>
             <a:pPr lvl="1"/>
             <a:r>
-              <a:rPr lang="en-US" smtClean="0"/>
+              <a:rPr lang="en-US"/>
               <a:t>Second level</a:t>
             </a:r>
           </a:p>
           <a:p>
             <a:pPr lvl="2"/>
             <a:r>
-              <a:rPr lang="en-US" smtClean="0"/>
+              <a:rPr lang="en-US"/>
               <a:t>Third level</a:t>
             </a:r>
           </a:p>
           <a:p>
             <a:pPr lvl="3"/>
             <a:r>
-              <a:rPr lang="en-US" smtClean="0"/>
+              <a:rPr lang="en-US"/>
               <a:t>Fourth level</a:t>
             </a:r>
           </a:p>
           <a:p>
             <a:pPr lvl="4"/>
             <a:r>
-              <a:rPr lang="en-US" smtClean="0"/>
+              <a:rPr lang="en-US"/>
               <a:t>Fifth level</a:t>
             </a:r>
-            <a:endParaRPr lang="en-US"/>
           </a:p>
         </p:txBody>
       </p:sp>
@@ -647,7 +657,7 @@
           <a:p>
             <a:fld id="{5BCAD085-E8A6-8845-BD4E-CB4CCA059FC4}" type="datetimeFigureOut">
               <a:rPr lang="en-US" smtClean="0"/>
-              <a:t>1/27/13</a:t>
+              <a:t>8/4/2026</a:t>
             </a:fld>
             <a:endParaRPr lang="en-US"/>
           </a:p>
@@ -689,7 +699,7 @@
           <a:p>
             <a:fld id="{C1FF6DA9-008F-8B48-92A6-B652298478BF}" type="slidenum">
               <a:rPr lang="en-US" smtClean="0"/>
-              <a:t>‹#›</a:t>
+              <a:t>‹Nº›</a:t>
             </a:fld>
             <a:endParaRPr lang="en-US"/>
           </a:p>
@@ -741,10 +751,9 @@
           <a:lstStyle/>
           <a:p>
             <a:r>
-              <a:rPr lang="en-US" smtClean="0"/>
+              <a:rPr lang="en-US"/>
               <a:t>Click to edit Master title style</a:t>
             </a:r>
-            <a:endParaRPr lang="en-US"/>
           </a:p>
         </p:txBody>
       </p:sp>
@@ -765,38 +774,37 @@
           <a:p>
             <a:pPr lvl="0"/>
             <a:r>
-              <a:rPr lang="en-US" smtClean="0"/>
+              <a:rPr lang="en-US"/>
               <a:t>Click to edit Master text styles</a:t>
             </a:r>
           </a:p>
           <a:p>
             <a:pPr lvl="1"/>
             <a:r>
-              <a:rPr lang="en-US" smtClean="0"/>
+              <a:rPr lang="en-US"/>
               <a:t>Second level</a:t>
             </a:r>
           </a:p>
           <a:p>
             <a:pPr lvl="2"/>
             <a:r>
-              <a:rPr lang="en-US" smtClean="0"/>
+              <a:rPr lang="en-US"/>
               <a:t>Third level</a:t>
             </a:r>
           </a:p>
           <a:p>
             <a:pPr lvl="3"/>
             <a:r>
-              <a:rPr lang="en-US" smtClean="0"/>
+              <a:rPr lang="en-US"/>
               <a:t>Fourth level</a:t>
             </a:r>
           </a:p>
           <a:p>
             <a:pPr lvl="4"/>
             <a:r>
-              <a:rPr lang="en-US" smtClean="0"/>
+              <a:rPr lang="en-US"/>
               <a:t>Fifth level</a:t>
             </a:r>
-            <a:endParaRPr lang="en-US"/>
           </a:p>
         </p:txBody>
       </p:sp>
@@ -817,7 +825,7 @@
           <a:p>
             <a:fld id="{5BCAD085-E8A6-8845-BD4E-CB4CCA059FC4}" type="datetimeFigureOut">
               <a:rPr lang="en-US" smtClean="0"/>
-              <a:t>1/27/13</a:t>
+              <a:t>8/4/2026</a:t>
             </a:fld>
             <a:endParaRPr lang="en-US"/>
           </a:p>
@@ -859,7 +867,7 @@
           <a:p>
             <a:fld id="{C1FF6DA9-008F-8B48-92A6-B652298478BF}" type="slidenum">
               <a:rPr lang="en-US" smtClean="0"/>
-              <a:t>‹#›</a:t>
+              <a:t>‹Nº›</a:t>
             </a:fld>
             <a:endParaRPr lang="en-US"/>
           </a:p>
@@ -920,10 +928,9 @@
           </a:lstStyle>
           <a:p>
             <a:r>
-              <a:rPr lang="en-US" smtClean="0"/>
+              <a:rPr lang="en-US"/>
               <a:t>Click to edit Master title style</a:t>
             </a:r>
-            <a:endParaRPr lang="en-US"/>
           </a:p>
         </p:txBody>
       </p:sp>
@@ -1040,7 +1047,7 @@
           <a:p>
             <a:pPr lvl="0"/>
             <a:r>
-              <a:rPr lang="en-US" smtClean="0"/>
+              <a:rPr lang="en-US"/>
               <a:t>Click to edit Master text styles</a:t>
             </a:r>
           </a:p>
@@ -1063,7 +1070,7 @@
           <a:p>
             <a:fld id="{5BCAD085-E8A6-8845-BD4E-CB4CCA059FC4}" type="datetimeFigureOut">
               <a:rPr lang="en-US" smtClean="0"/>
-              <a:t>1/27/13</a:t>
+              <a:t>8/4/2026</a:t>
             </a:fld>
             <a:endParaRPr lang="en-US"/>
           </a:p>
@@ -1105,7 +1112,7 @@
           <a:p>
             <a:fld id="{C1FF6DA9-008F-8B48-92A6-B652298478BF}" type="slidenum">
               <a:rPr lang="en-US" smtClean="0"/>
-              <a:t>‹#›</a:t>
+              <a:t>‹Nº›</a:t>
             </a:fld>
             <a:endParaRPr lang="en-US"/>
           </a:p>
@@ -1157,10 +1164,9 @@
           <a:lstStyle/>
           <a:p>
             <a:r>
-              <a:rPr lang="en-US" smtClean="0"/>
+              <a:rPr lang="en-US"/>
               <a:t>Click to edit Master title style</a:t>
             </a:r>
-            <a:endParaRPr lang="en-US"/>
           </a:p>
         </p:txBody>
       </p:sp>
@@ -1214,38 +1220,37 @@
           <a:p>
             <a:pPr lvl="0"/>
             <a:r>
-              <a:rPr lang="en-US" smtClean="0"/>
+              <a:rPr lang="en-US"/>
               <a:t>Click to edit Master text styles</a:t>
             </a:r>
           </a:p>
           <a:p>
             <a:pPr lvl="1"/>
             <a:r>
-              <a:rPr lang="en-US" smtClean="0"/>
+              <a:rPr lang="en-US"/>
               <a:t>Second level</a:t>
             </a:r>
           </a:p>
           <a:p>
             <a:pPr lvl="2"/>
             <a:r>
-              <a:rPr lang="en-US" smtClean="0"/>
+              <a:rPr lang="en-US"/>
               <a:t>Third level</a:t>
             </a:r>
           </a:p>
           <a:p>
             <a:pPr lvl="3"/>
             <a:r>
-              <a:rPr lang="en-US" smtClean="0"/>
+              <a:rPr lang="en-US"/>
               <a:t>Fourth level</a:t>
             </a:r>
           </a:p>
           <a:p>
             <a:pPr lvl="4"/>
             <a:r>
-              <a:rPr lang="en-US" smtClean="0"/>
+              <a:rPr lang="en-US"/>
               <a:t>Fifth level</a:t>
             </a:r>
-            <a:endParaRPr lang="en-US"/>
           </a:p>
         </p:txBody>
       </p:sp>
@@ -1299,38 +1304,37 @@
           <a:p>
             <a:pPr lvl="0"/>
             <a:r>
-              <a:rPr lang="en-US" smtClean="0"/>
+              <a:rPr lang="en-US"/>
               <a:t>Click to edit Master text styles</a:t>
             </a:r>
           </a:p>
           <a:p>
             <a:pPr lvl="1"/>
             <a:r>
-              <a:rPr lang="en-US" smtClean="0"/>
+              <a:rPr lang="en-US"/>
               <a:t>Second level</a:t>
             </a:r>
           </a:p>
           <a:p>
             <a:pPr lvl="2"/>
             <a:r>
-              <a:rPr lang="en-US" smtClean="0"/>
+              <a:rPr lang="en-US"/>
               <a:t>Third level</a:t>
             </a:r>
           </a:p>
           <a:p>
             <a:pPr lvl="3"/>
             <a:r>
-              <a:rPr lang="en-US" smtClean="0"/>
+              <a:rPr lang="en-US"/>
               <a:t>Fourth level</a:t>
             </a:r>
           </a:p>
           <a:p>
             <a:pPr lvl="4"/>
             <a:r>
-              <a:rPr lang="en-US" smtClean="0"/>
+              <a:rPr lang="en-US"/>
               <a:t>Fifth level</a:t>
             </a:r>
-            <a:endParaRPr lang="en-US"/>
           </a:p>
         </p:txBody>
       </p:sp>
@@ -1351,7 +1355,7 @@
           <a:p>
             <a:fld id="{5BCAD085-E8A6-8845-BD4E-CB4CCA059FC4}" type="datetimeFigureOut">
               <a:rPr lang="en-US" smtClean="0"/>
-              <a:t>1/27/13</a:t>
+              <a:t>8/4/2026</a:t>
             </a:fld>
             <a:endParaRPr lang="en-US"/>
           </a:p>
@@ -1393,7 +1397,7 @@
           <a:p>
             <a:fld id="{C1FF6DA9-008F-8B48-92A6-B652298478BF}" type="slidenum">
               <a:rPr lang="en-US" smtClean="0"/>
-              <a:t>‹#›</a:t>
+              <a:t>‹Nº›</a:t>
             </a:fld>
             <a:endParaRPr lang="en-US"/>
           </a:p>
@@ -1449,10 +1453,9 @@
           </a:lstStyle>
           <a:p>
             <a:r>
-              <a:rPr lang="en-US" smtClean="0"/>
+              <a:rPr lang="en-US"/>
               <a:t>Click to edit Master title style</a:t>
             </a:r>
-            <a:endParaRPr lang="en-US"/>
           </a:p>
         </p:txBody>
       </p:sp>
@@ -1515,7 +1518,7 @@
           <a:p>
             <a:pPr lvl="0"/>
             <a:r>
-              <a:rPr lang="en-US" smtClean="0"/>
+              <a:rPr lang="en-US"/>
               <a:t>Click to edit Master text styles</a:t>
             </a:r>
           </a:p>
@@ -1571,38 +1574,37 @@
           <a:p>
             <a:pPr lvl="0"/>
             <a:r>
-              <a:rPr lang="en-US" smtClean="0"/>
+              <a:rPr lang="en-US"/>
               <a:t>Click to edit Master text styles</a:t>
             </a:r>
           </a:p>
           <a:p>
             <a:pPr lvl="1"/>
             <a:r>
-              <a:rPr lang="en-US" smtClean="0"/>
+              <a:rPr lang="en-US"/>
               <a:t>Second level</a:t>
             </a:r>
           </a:p>
           <a:p>
             <a:pPr lvl="2"/>
             <a:r>
-              <a:rPr lang="en-US" smtClean="0"/>
+              <a:rPr lang="en-US"/>
               <a:t>Third level</a:t>
             </a:r>
           </a:p>
           <a:p>
             <a:pPr lvl="3"/>
             <a:r>
-              <a:rPr lang="en-US" smtClean="0"/>
+              <a:rPr lang="en-US"/>
               <a:t>Fourth level</a:t>
             </a:r>
           </a:p>
           <a:p>
             <a:pPr lvl="4"/>
             <a:r>
-              <a:rPr lang="en-US" smtClean="0"/>
+              <a:rPr lang="en-US"/>
               <a:t>Fifth level</a:t>
             </a:r>
-            <a:endParaRPr lang="en-US"/>
           </a:p>
         </p:txBody>
       </p:sp>
@@ -1665,7 +1667,7 @@
           <a:p>
             <a:pPr lvl="0"/>
             <a:r>
-              <a:rPr lang="en-US" smtClean="0"/>
+              <a:rPr lang="en-US"/>
               <a:t>Click to edit Master text styles</a:t>
             </a:r>
           </a:p>
@@ -1721,38 +1723,37 @@
           <a:p>
             <a:pPr lvl="0"/>
             <a:r>
-              <a:rPr lang="en-US" smtClean="0"/>
+              <a:rPr lang="en-US"/>
               <a:t>Click to edit Master text styles</a:t>
             </a:r>
           </a:p>
           <a:p>
             <a:pPr lvl="1"/>
             <a:r>
-              <a:rPr lang="en-US" smtClean="0"/>
+              <a:rPr lang="en-US"/>
               <a:t>Second level</a:t>
             </a:r>
           </a:p>
           <a:p>
             <a:pPr lvl="2"/>
             <a:r>
-              <a:rPr lang="en-US" smtClean="0"/>
+              <a:rPr lang="en-US"/>
               <a:t>Third level</a:t>
             </a:r>
           </a:p>
           <a:p>
             <a:pPr lvl="3"/>
             <a:r>
-              <a:rPr lang="en-US" smtClean="0"/>
+              <a:rPr lang="en-US"/>
               <a:t>Fourth level</a:t>
             </a:r>
           </a:p>
           <a:p>
             <a:pPr lvl="4"/>
             <a:r>
-              <a:rPr lang="en-US" smtClean="0"/>
+              <a:rPr lang="en-US"/>
               <a:t>Fifth level</a:t>
             </a:r>
-            <a:endParaRPr lang="en-US"/>
           </a:p>
         </p:txBody>
       </p:sp>
@@ -1773,7 +1774,7 @@
           <a:p>
             <a:fld id="{5BCAD085-E8A6-8845-BD4E-CB4CCA059FC4}" type="datetimeFigureOut">
               <a:rPr lang="en-US" smtClean="0"/>
-              <a:t>1/27/13</a:t>
+              <a:t>8/4/2026</a:t>
             </a:fld>
             <a:endParaRPr lang="en-US"/>
           </a:p>
@@ -1815,7 +1816,7 @@
           <a:p>
             <a:fld id="{C1FF6DA9-008F-8B48-92A6-B652298478BF}" type="slidenum">
               <a:rPr lang="en-US" smtClean="0"/>
-              <a:t>‹#›</a:t>
+              <a:t>‹Nº›</a:t>
             </a:fld>
             <a:endParaRPr lang="en-US"/>
           </a:p>
@@ -1867,10 +1868,9 @@
           <a:lstStyle/>
           <a:p>
             <a:r>
-              <a:rPr lang="en-US" smtClean="0"/>
+              <a:rPr lang="en-US"/>
               <a:t>Click to edit Master title style</a:t>
             </a:r>
-            <a:endParaRPr lang="en-US"/>
           </a:p>
         </p:txBody>
       </p:sp>
@@ -1891,7 +1891,7 @@
           <a:p>
             <a:fld id="{5BCAD085-E8A6-8845-BD4E-CB4CCA059FC4}" type="datetimeFigureOut">
               <a:rPr lang="en-US" smtClean="0"/>
-              <a:t>1/27/13</a:t>
+              <a:t>8/4/2026</a:t>
             </a:fld>
             <a:endParaRPr lang="en-US"/>
           </a:p>
@@ -1933,7 +1933,7 @@
           <a:p>
             <a:fld id="{C1FF6DA9-008F-8B48-92A6-B652298478BF}" type="slidenum">
               <a:rPr lang="en-US" smtClean="0"/>
-              <a:t>‹#›</a:t>
+              <a:t>‹Nº›</a:t>
             </a:fld>
             <a:endParaRPr lang="en-US"/>
           </a:p>
@@ -1986,7 +1986,7 @@
           <a:p>
             <a:fld id="{5BCAD085-E8A6-8845-BD4E-CB4CCA059FC4}" type="datetimeFigureOut">
               <a:rPr lang="en-US" smtClean="0"/>
-              <a:t>1/27/13</a:t>
+              <a:t>8/4/2026</a:t>
             </a:fld>
             <a:endParaRPr lang="en-US"/>
           </a:p>
@@ -2028,7 +2028,7 @@
           <a:p>
             <a:fld id="{C1FF6DA9-008F-8B48-92A6-B652298478BF}" type="slidenum">
               <a:rPr lang="en-US" smtClean="0"/>
-              <a:t>‹#›</a:t>
+              <a:t>‹Nº›</a:t>
             </a:fld>
             <a:endParaRPr lang="en-US"/>
           </a:p>
@@ -2089,10 +2089,9 @@
           </a:lstStyle>
           <a:p>
             <a:r>
-              <a:rPr lang="en-US" smtClean="0"/>
+              <a:rPr lang="en-US"/>
               <a:t>Click to edit Master title style</a:t>
             </a:r>
-            <a:endParaRPr lang="en-US"/>
           </a:p>
         </p:txBody>
       </p:sp>
@@ -2146,38 +2145,37 @@
           <a:p>
             <a:pPr lvl="0"/>
             <a:r>
-              <a:rPr lang="en-US" smtClean="0"/>
+              <a:rPr lang="en-US"/>
               <a:t>Click to edit Master text styles</a:t>
             </a:r>
           </a:p>
           <a:p>
             <a:pPr lvl="1"/>
             <a:r>
-              <a:rPr lang="en-US" smtClean="0"/>
+              <a:rPr lang="en-US"/>
               <a:t>Second level</a:t>
             </a:r>
           </a:p>
           <a:p>
             <a:pPr lvl="2"/>
             <a:r>
-              <a:rPr lang="en-US" smtClean="0"/>
+              <a:rPr lang="en-US"/>
               <a:t>Third level</a:t>
             </a:r>
           </a:p>
           <a:p>
             <a:pPr lvl="3"/>
             <a:r>
-              <a:rPr lang="en-US" smtClean="0"/>
+              <a:rPr lang="en-US"/>
               <a:t>Fourth level</a:t>
             </a:r>
           </a:p>
           <a:p>
             <a:pPr lvl="4"/>
             <a:r>
-              <a:rPr lang="en-US" smtClean="0"/>
+              <a:rPr lang="en-US"/>
               <a:t>Fifth level</a:t>
             </a:r>
-            <a:endParaRPr lang="en-US"/>
           </a:p>
         </p:txBody>
       </p:sp>
@@ -2240,7 +2238,7 @@
           <a:p>
             <a:pPr lvl="0"/>
             <a:r>
-              <a:rPr lang="en-US" smtClean="0"/>
+              <a:rPr lang="en-US"/>
               <a:t>Click to edit Master text styles</a:t>
             </a:r>
           </a:p>
@@ -2263,7 +2261,7 @@
           <a:p>
             <a:fld id="{5BCAD085-E8A6-8845-BD4E-CB4CCA059FC4}" type="datetimeFigureOut">
               <a:rPr lang="en-US" smtClean="0"/>
-              <a:t>1/27/13</a:t>
+              <a:t>8/4/2026</a:t>
             </a:fld>
             <a:endParaRPr lang="en-US"/>
           </a:p>
@@ -2305,7 +2303,7 @@
           <a:p>
             <a:fld id="{C1FF6DA9-008F-8B48-92A6-B652298478BF}" type="slidenum">
               <a:rPr lang="en-US" smtClean="0"/>
-              <a:t>‹#›</a:t>
+              <a:t>‹Nº›</a:t>
             </a:fld>
             <a:endParaRPr lang="en-US"/>
           </a:p>
@@ -2366,10 +2364,9 @@
           </a:lstStyle>
           <a:p>
             <a:r>
-              <a:rPr lang="en-US" smtClean="0"/>
+              <a:rPr lang="en-US"/>
               <a:t>Click to edit Master title style</a:t>
             </a:r>
-            <a:endParaRPr lang="en-US"/>
           </a:p>
         </p:txBody>
       </p:sp>
@@ -2493,7 +2490,7 @@
           <a:p>
             <a:pPr lvl="0"/>
             <a:r>
-              <a:rPr lang="en-US" smtClean="0"/>
+              <a:rPr lang="en-US"/>
               <a:t>Click to edit Master text styles</a:t>
             </a:r>
           </a:p>
@@ -2516,7 +2513,7 @@
           <a:p>
             <a:fld id="{5BCAD085-E8A6-8845-BD4E-CB4CCA059FC4}" type="datetimeFigureOut">
               <a:rPr lang="en-US" smtClean="0"/>
-              <a:t>1/27/13</a:t>
+              <a:t>8/4/2026</a:t>
             </a:fld>
             <a:endParaRPr lang="en-US"/>
           </a:p>
@@ -2558,7 +2555,7 @@
           <a:p>
             <a:fld id="{C1FF6DA9-008F-8B48-92A6-B652298478BF}" type="slidenum">
               <a:rPr lang="en-US" smtClean="0"/>
-              <a:t>‹#›</a:t>
+              <a:t>‹Nº›</a:t>
             </a:fld>
             <a:endParaRPr lang="en-US"/>
           </a:p>
@@ -2625,10 +2622,9 @@
           <a:lstStyle/>
           <a:p>
             <a:r>
-              <a:rPr lang="en-US" smtClean="0"/>
+              <a:rPr lang="en-US"/>
               <a:t>Click to edit Master title style</a:t>
             </a:r>
-            <a:endParaRPr lang="en-US"/>
           </a:p>
         </p:txBody>
       </p:sp>
@@ -2659,38 +2655,37 @@
           <a:p>
             <a:pPr lvl="0"/>
             <a:r>
-              <a:rPr lang="en-US" smtClean="0"/>
+              <a:rPr lang="en-US"/>
               <a:t>Click to edit Master text styles</a:t>
             </a:r>
           </a:p>
           <a:p>
             <a:pPr lvl="1"/>
             <a:r>
-              <a:rPr lang="en-US" smtClean="0"/>
+              <a:rPr lang="en-US"/>
               <a:t>Second level</a:t>
             </a:r>
           </a:p>
           <a:p>
             <a:pPr lvl="2"/>
             <a:r>
-              <a:rPr lang="en-US" smtClean="0"/>
+              <a:rPr lang="en-US"/>
               <a:t>Third level</a:t>
             </a:r>
           </a:p>
           <a:p>
             <a:pPr lvl="3"/>
             <a:r>
-              <a:rPr lang="en-US" smtClean="0"/>
+              <a:rPr lang="en-US"/>
               <a:t>Fourth level</a:t>
             </a:r>
           </a:p>
           <a:p>
             <a:pPr lvl="4"/>
             <a:r>
-              <a:rPr lang="en-US" smtClean="0"/>
+              <a:rPr lang="en-US"/>
               <a:t>Fifth level</a:t>
             </a:r>
-            <a:endParaRPr lang="en-US"/>
           </a:p>
         </p:txBody>
       </p:sp>
@@ -2729,7 +2724,7 @@
           <a:p>
             <a:fld id="{5BCAD085-E8A6-8845-BD4E-CB4CCA059FC4}" type="datetimeFigureOut">
               <a:rPr lang="en-US" smtClean="0"/>
-              <a:t>1/27/13</a:t>
+              <a:t>8/4/2026</a:t>
             </a:fld>
             <a:endParaRPr lang="en-US"/>
           </a:p>
@@ -2807,7 +2802,7 @@
           <a:p>
             <a:fld id="{C1FF6DA9-008F-8B48-92A6-B652298478BF}" type="slidenum">
               <a:rPr lang="en-US" smtClean="0"/>
-              <a:t>‹#›</a:t>
+              <a:t>‹Nº›</a:t>
             </a:fld>
             <a:endParaRPr lang="en-US"/>
           </a:p>
@@ -3088,7 +3083,7 @@
 </file>
 
 <file path=ppt/slides/slide1.xml><?xml version="1.0" encoding="utf-8"?>
-<p:sld xmlns:a="http://schemas.openxmlformats.org/drawingml/2006/main" xmlns:p="http://schemas.openxmlformats.org/presentationml/2006/main" xmlns:r="http://schemas.openxmlformats.org/officeDocument/2006/relationships">
+<p:sld xmlns:a="http://schemas.openxmlformats.org/drawingml/2006/main" xmlns:r="http://schemas.openxmlformats.org/officeDocument/2006/relationships" xmlns:p="http://schemas.openxmlformats.org/presentationml/2006/main">
   <p:cSld>
     <p:spTree>
       <p:nvGrpSpPr>
@@ -3096,7 +3091,14 @@
         <p:cNvGrpSpPr/>
         <p:nvPr/>
       </p:nvGrpSpPr>
-      <p:grpSpPr/>
+      <p:grpSpPr>
+        <a:xfrm>
+          <a:off x="0" y="0"/>
+          <a:ext cx="0" cy="0"/>
+          <a:chOff x="0" y="0"/>
+          <a:chExt cx="0" cy="0"/>
+        </a:xfrm>
+      </p:grpSpPr>
       <p:sp>
         <p:nvSpPr>
           <p:cNvPr id="2" name="Rectangle 1"/>
@@ -3138,6 +3140,7 @@
           <a:lstStyle/>
           <a:p>
             <a:pPr algn="ctr"/>
+            <a:endParaRPr/>
           </a:p>
         </p:txBody>
       </p:sp>
@@ -3182,6 +3185,7 @@
           <a:lstStyle/>
           <a:p>
             <a:pPr algn="ctr"/>
+            <a:endParaRPr/>
           </a:p>
         </p:txBody>
       </p:sp>
@@ -3226,6 +3230,7 @@
           <a:lstStyle/>
           <a:p>
             <a:pPr algn="ctr"/>
+            <a:endParaRPr/>
           </a:p>
         </p:txBody>
       </p:sp>
@@ -3270,6 +3275,7 @@
           <a:lstStyle/>
           <a:p>
             <a:pPr algn="ctr"/>
+            <a:endParaRPr/>
           </a:p>
         </p:txBody>
       </p:sp>
@@ -3414,7 +3420,7 @@
 </file>
 
 <file path=ppt/slides/slide10.xml><?xml version="1.0" encoding="utf-8"?>
-<p:sld xmlns:a="http://schemas.openxmlformats.org/drawingml/2006/main" xmlns:p="http://schemas.openxmlformats.org/presentationml/2006/main" xmlns:r="http://schemas.openxmlformats.org/officeDocument/2006/relationships">
+<p:sld xmlns:a="http://schemas.openxmlformats.org/drawingml/2006/main" xmlns:r="http://schemas.openxmlformats.org/officeDocument/2006/relationships" xmlns:p="http://schemas.openxmlformats.org/presentationml/2006/main">
   <p:cSld>
     <p:spTree>
       <p:nvGrpSpPr>
@@ -3422,7 +3428,14 @@
         <p:cNvGrpSpPr/>
         <p:nvPr/>
       </p:nvGrpSpPr>
-      <p:grpSpPr/>
+      <p:grpSpPr>
+        <a:xfrm>
+          <a:off x="0" y="0"/>
+          <a:ext cx="0" cy="0"/>
+          <a:chOff x="0" y="0"/>
+          <a:chExt cx="0" cy="0"/>
+        </a:xfrm>
+      </p:grpSpPr>
       <p:pic>
         <p:nvPicPr>
           <p:cNvPr id="2" name="Picture 1" descr="austral_closing_bg.jpg"/>
@@ -3489,7 +3502,7 @@
 </file>
 
 <file path=ppt/slides/slide2.xml><?xml version="1.0" encoding="utf-8"?>
-<p:sld xmlns:a="http://schemas.openxmlformats.org/drawingml/2006/main" xmlns:p="http://schemas.openxmlformats.org/presentationml/2006/main" xmlns:r="http://schemas.openxmlformats.org/officeDocument/2006/relationships">
+<p:sld xmlns:a="http://schemas.openxmlformats.org/drawingml/2006/main" xmlns:r="http://schemas.openxmlformats.org/officeDocument/2006/relationships" xmlns:p="http://schemas.openxmlformats.org/presentationml/2006/main" show="0">
   <p:cSld>
     <p:spTree>
       <p:nvGrpSpPr>
@@ -3497,7 +3510,14 @@
         <p:cNvGrpSpPr/>
         <p:nvPr/>
       </p:nvGrpSpPr>
-      <p:grpSpPr/>
+      <p:grpSpPr>
+        <a:xfrm>
+          <a:off x="0" y="0"/>
+          <a:ext cx="0" cy="0"/>
+          <a:chOff x="0" y="0"/>
+          <a:chExt cx="0" cy="0"/>
+        </a:xfrm>
+      </p:grpSpPr>
       <p:sp>
         <p:nvSpPr>
           <p:cNvPr id="2" name="Right Triangle 1"/>
@@ -3539,6 +3559,7 @@
           <a:lstStyle/>
           <a:p>
             <a:pPr algn="ctr"/>
+            <a:endParaRPr/>
           </a:p>
         </p:txBody>
       </p:sp>
@@ -3806,7 +3827,7 @@
 </file>
 
 <file path=ppt/slides/slide3.xml><?xml version="1.0" encoding="utf-8"?>
-<p:sld xmlns:a="http://schemas.openxmlformats.org/drawingml/2006/main" xmlns:p="http://schemas.openxmlformats.org/presentationml/2006/main" xmlns:r="http://schemas.openxmlformats.org/officeDocument/2006/relationships">
+<p:sld xmlns:a="http://schemas.openxmlformats.org/drawingml/2006/main" xmlns:r="http://schemas.openxmlformats.org/officeDocument/2006/relationships" xmlns:p="http://schemas.openxmlformats.org/presentationml/2006/main">
   <p:cSld>
     <p:spTree>
       <p:nvGrpSpPr>
@@ -3814,7 +3835,14 @@
         <p:cNvGrpSpPr/>
         <p:nvPr/>
       </p:nvGrpSpPr>
-      <p:grpSpPr/>
+      <p:grpSpPr>
+        <a:xfrm>
+          <a:off x="0" y="0"/>
+          <a:ext cx="0" cy="0"/>
+          <a:chOff x="0" y="0"/>
+          <a:chExt cx="0" cy="0"/>
+        </a:xfrm>
+      </p:grpSpPr>
       <p:sp>
         <p:nvSpPr>
           <p:cNvPr id="2" name="Right Triangle 1"/>
@@ -3823,7 +3851,7 @@
         </p:nvSpPr>
         <p:spPr>
           <a:xfrm>
-            <a:off x="186158" y="-198852"/>
+            <a:off x="0" y="0"/>
             <a:ext cx="1901656" cy="2273969"/>
           </a:xfrm>
           <a:prstGeom prst="rtTriangle">
@@ -3856,6 +3884,7 @@
           <a:lstStyle/>
           <a:p>
             <a:pPr algn="ctr"/>
+            <a:endParaRPr/>
           </a:p>
         </p:txBody>
       </p:sp>
@@ -3970,14 +3999,32 @@
                 <a:tableStyleId>{5C22544A-7EE6-4342-B048-85BDC9FD1C3A}</a:tableStyleId>
               </a:tblPr>
               <a:tblGrid>
-                <a:gridCol w="1600000"/>
-                <a:gridCol w="7600000"/>
-                <a:gridCol w="1600000"/>
+                <a:gridCol w="1600000">
+                  <a:extLst>
+                    <a:ext uri="{9D8B030D-6E8A-4147-A177-3AD203B41FA5}">
+                      <a16:colId xmlns:a16="http://schemas.microsoft.com/office/drawing/2014/main" val="20000"/>
+                    </a:ext>
+                  </a:extLst>
+                </a:gridCol>
+                <a:gridCol w="7600000">
+                  <a:extLst>
+                    <a:ext uri="{9D8B030D-6E8A-4147-A177-3AD203B41FA5}">
+                      <a16:colId xmlns:a16="http://schemas.microsoft.com/office/drawing/2014/main" val="20001"/>
+                    </a:ext>
+                  </a:extLst>
+                </a:gridCol>
+                <a:gridCol w="1600000">
+                  <a:extLst>
+                    <a:ext uri="{9D8B030D-6E8A-4147-A177-3AD203B41FA5}">
+                      <a16:colId xmlns:a16="http://schemas.microsoft.com/office/drawing/2014/main" val="20002"/>
+                    </a:ext>
+                  </a:extLst>
+                </a:gridCol>
               </a:tblGrid>
               <a:tr h="350000">
                 <a:tc>
                   <a:txBody>
-                    <a:bodyPr wrap="square"/>
+                    <a:bodyPr/>
                     <a:lstStyle/>
                     <a:p>
                       <a:pPr algn="l"/>
@@ -4000,7 +4047,7 @@
                 </a:tc>
                 <a:tc>
                   <a:txBody>
-                    <a:bodyPr wrap="square"/>
+                    <a:bodyPr/>
                     <a:lstStyle/>
                     <a:p>
                       <a:pPr algn="l"/>
@@ -4023,7 +4070,7 @@
                 </a:tc>
                 <a:tc>
                   <a:txBody>
-                    <a:bodyPr wrap="square"/>
+                    <a:bodyPr/>
                     <a:lstStyle/>
                     <a:p>
                       <a:pPr algn="ctr"/>
@@ -4044,11 +4091,16 @@
                     </a:solidFill>
                   </a:tcPr>
                 </a:tc>
+                <a:extLst>
+                  <a:ext uri="{0D108BD9-81ED-4DB2-BD59-A6C34878D82A}">
+                    <a16:rowId xmlns:a16="http://schemas.microsoft.com/office/drawing/2014/main" val="10000"/>
+                  </a:ext>
+                </a:extLst>
               </a:tr>
               <a:tr h="350000">
                 <a:tc>
                   <a:txBody>
-                    <a:bodyPr wrap="square"/>
+                    <a:bodyPr/>
                     <a:lstStyle/>
                     <a:p>
                       <a:pPr algn="l"/>
@@ -4071,7 +4123,7 @@
                 </a:tc>
                 <a:tc>
                   <a:txBody>
-                    <a:bodyPr wrap="square"/>
+                    <a:bodyPr/>
                     <a:lstStyle/>
                     <a:p>
                       <a:pPr algn="l"/>
@@ -4094,7 +4146,7 @@
                 </a:tc>
                 <a:tc>
                   <a:txBody>
-                    <a:bodyPr wrap="square"/>
+                    <a:bodyPr/>
                     <a:lstStyle/>
                     <a:p>
                       <a:pPr algn="ctr"/>
@@ -4115,11 +4167,16 @@
                     </a:solidFill>
                   </a:tcPr>
                 </a:tc>
+                <a:extLst>
+                  <a:ext uri="{0D108BD9-81ED-4DB2-BD59-A6C34878D82A}">
+                    <a16:rowId xmlns:a16="http://schemas.microsoft.com/office/drawing/2014/main" val="10001"/>
+                  </a:ext>
+                </a:extLst>
               </a:tr>
               <a:tr h="350000">
                 <a:tc>
                   <a:txBody>
-                    <a:bodyPr wrap="square"/>
+                    <a:bodyPr/>
                     <a:lstStyle/>
                     <a:p>
                       <a:pPr algn="l"/>
@@ -4142,7 +4199,7 @@
                 </a:tc>
                 <a:tc>
                   <a:txBody>
-                    <a:bodyPr wrap="square"/>
+                    <a:bodyPr/>
                     <a:lstStyle/>
                     <a:p>
                       <a:pPr algn="l"/>
@@ -4165,7 +4222,7 @@
                 </a:tc>
                 <a:tc>
                   <a:txBody>
-                    <a:bodyPr wrap="square"/>
+                    <a:bodyPr/>
                     <a:lstStyle/>
                     <a:p>
                       <a:pPr algn="ctr"/>
@@ -4186,11 +4243,16 @@
                     </a:solidFill>
                   </a:tcPr>
                 </a:tc>
+                <a:extLst>
+                  <a:ext uri="{0D108BD9-81ED-4DB2-BD59-A6C34878D82A}">
+                    <a16:rowId xmlns:a16="http://schemas.microsoft.com/office/drawing/2014/main" val="10002"/>
+                  </a:ext>
+                </a:extLst>
               </a:tr>
               <a:tr h="350000">
                 <a:tc>
                   <a:txBody>
-                    <a:bodyPr wrap="square"/>
+                    <a:bodyPr/>
                     <a:lstStyle/>
                     <a:p>
                       <a:pPr algn="l"/>
@@ -4213,7 +4275,7 @@
                 </a:tc>
                 <a:tc>
                   <a:txBody>
-                    <a:bodyPr wrap="square"/>
+                    <a:bodyPr/>
                     <a:lstStyle/>
                     <a:p>
                       <a:pPr algn="l"/>
@@ -4236,7 +4298,7 @@
                 </a:tc>
                 <a:tc>
                   <a:txBody>
-                    <a:bodyPr wrap="square"/>
+                    <a:bodyPr/>
                     <a:lstStyle/>
                     <a:p>
                       <a:pPr algn="ctr"/>
@@ -4257,11 +4319,16 @@
                     </a:solidFill>
                   </a:tcPr>
                 </a:tc>
+                <a:extLst>
+                  <a:ext uri="{0D108BD9-81ED-4DB2-BD59-A6C34878D82A}">
+                    <a16:rowId xmlns:a16="http://schemas.microsoft.com/office/drawing/2014/main" val="10003"/>
+                  </a:ext>
+                </a:extLst>
               </a:tr>
               <a:tr h="350000">
                 <a:tc>
                   <a:txBody>
-                    <a:bodyPr wrap="square"/>
+                    <a:bodyPr/>
                     <a:lstStyle/>
                     <a:p>
                       <a:pPr algn="l"/>
@@ -4284,7 +4351,7 @@
                 </a:tc>
                 <a:tc>
                   <a:txBody>
-                    <a:bodyPr wrap="square"/>
+                    <a:bodyPr/>
                     <a:lstStyle/>
                     <a:p>
                       <a:pPr algn="l"/>
@@ -4307,7 +4374,7 @@
                 </a:tc>
                 <a:tc>
                   <a:txBody>
-                    <a:bodyPr wrap="square"/>
+                    <a:bodyPr/>
                     <a:lstStyle/>
                     <a:p>
                       <a:pPr algn="ctr"/>
@@ -4328,11 +4395,16 @@
                     </a:solidFill>
                   </a:tcPr>
                 </a:tc>
+                <a:extLst>
+                  <a:ext uri="{0D108BD9-81ED-4DB2-BD59-A6C34878D82A}">
+                    <a16:rowId xmlns:a16="http://schemas.microsoft.com/office/drawing/2014/main" val="10004"/>
+                  </a:ext>
+                </a:extLst>
               </a:tr>
               <a:tr h="350000">
                 <a:tc>
                   <a:txBody>
-                    <a:bodyPr wrap="square"/>
+                    <a:bodyPr/>
                     <a:lstStyle/>
                     <a:p>
                       <a:pPr algn="l"/>
@@ -4355,7 +4427,7 @@
                 </a:tc>
                 <a:tc>
                   <a:txBody>
-                    <a:bodyPr wrap="square"/>
+                    <a:bodyPr/>
                     <a:lstStyle/>
                     <a:p>
                       <a:pPr algn="l"/>
@@ -4378,7 +4450,7 @@
                 </a:tc>
                 <a:tc>
                   <a:txBody>
-                    <a:bodyPr wrap="square"/>
+                    <a:bodyPr/>
                     <a:lstStyle/>
                     <a:p>
                       <a:pPr algn="ctr"/>
@@ -4399,11 +4471,16 @@
                     </a:solidFill>
                   </a:tcPr>
                 </a:tc>
+                <a:extLst>
+                  <a:ext uri="{0D108BD9-81ED-4DB2-BD59-A6C34878D82A}">
+                    <a16:rowId xmlns:a16="http://schemas.microsoft.com/office/drawing/2014/main" val="10005"/>
+                  </a:ext>
+                </a:extLst>
               </a:tr>
               <a:tr h="350000">
                 <a:tc>
                   <a:txBody>
-                    <a:bodyPr wrap="square"/>
+                    <a:bodyPr/>
                     <a:lstStyle/>
                     <a:p>
                       <a:pPr algn="l"/>
@@ -4426,7 +4503,7 @@
                 </a:tc>
                 <a:tc>
                   <a:txBody>
-                    <a:bodyPr wrap="square"/>
+                    <a:bodyPr/>
                     <a:lstStyle/>
                     <a:p>
                       <a:pPr algn="l"/>
@@ -4449,7 +4526,7 @@
                 </a:tc>
                 <a:tc>
                   <a:txBody>
-                    <a:bodyPr wrap="square"/>
+                    <a:bodyPr/>
                     <a:lstStyle/>
                     <a:p>
                       <a:pPr algn="ctr"/>
@@ -4470,11 +4547,16 @@
                     </a:solidFill>
                   </a:tcPr>
                 </a:tc>
+                <a:extLst>
+                  <a:ext uri="{0D108BD9-81ED-4DB2-BD59-A6C34878D82A}">
+                    <a16:rowId xmlns:a16="http://schemas.microsoft.com/office/drawing/2014/main" val="10006"/>
+                  </a:ext>
+                </a:extLst>
               </a:tr>
               <a:tr h="350000">
                 <a:tc>
                   <a:txBody>
-                    <a:bodyPr wrap="square"/>
+                    <a:bodyPr/>
                     <a:lstStyle/>
                     <a:p>
                       <a:pPr algn="l"/>
@@ -4497,7 +4579,7 @@
                 </a:tc>
                 <a:tc>
                   <a:txBody>
-                    <a:bodyPr wrap="square"/>
+                    <a:bodyPr/>
                     <a:lstStyle/>
                     <a:p>
                       <a:pPr algn="l"/>
@@ -4520,7 +4602,7 @@
                 </a:tc>
                 <a:tc>
                   <a:txBody>
-                    <a:bodyPr wrap="square"/>
+                    <a:bodyPr/>
                     <a:lstStyle/>
                     <a:p>
                       <a:pPr algn="ctr"/>
@@ -4541,11 +4623,16 @@
                     </a:solidFill>
                   </a:tcPr>
                 </a:tc>
+                <a:extLst>
+                  <a:ext uri="{0D108BD9-81ED-4DB2-BD59-A6C34878D82A}">
+                    <a16:rowId xmlns:a16="http://schemas.microsoft.com/office/drawing/2014/main" val="10007"/>
+                  </a:ext>
+                </a:extLst>
               </a:tr>
               <a:tr h="350000">
                 <a:tc>
                   <a:txBody>
-                    <a:bodyPr wrap="square"/>
+                    <a:bodyPr/>
                     <a:lstStyle/>
                     <a:p>
                       <a:pPr algn="l"/>
@@ -4568,7 +4655,7 @@
                 </a:tc>
                 <a:tc>
                   <a:txBody>
-                    <a:bodyPr wrap="square"/>
+                    <a:bodyPr/>
                     <a:lstStyle/>
                     <a:p>
                       <a:pPr algn="l"/>
@@ -4591,7 +4678,7 @@
                 </a:tc>
                 <a:tc>
                   <a:txBody>
-                    <a:bodyPr wrap="square"/>
+                    <a:bodyPr/>
                     <a:lstStyle/>
                     <a:p>
                       <a:pPr algn="ctr"/>
@@ -4612,11 +4699,16 @@
                     </a:solidFill>
                   </a:tcPr>
                 </a:tc>
+                <a:extLst>
+                  <a:ext uri="{0D108BD9-81ED-4DB2-BD59-A6C34878D82A}">
+                    <a16:rowId xmlns:a16="http://schemas.microsoft.com/office/drawing/2014/main" val="10008"/>
+                  </a:ext>
+                </a:extLst>
               </a:tr>
               <a:tr h="350000">
                 <a:tc>
                   <a:txBody>
-                    <a:bodyPr wrap="square"/>
+                    <a:bodyPr/>
                     <a:lstStyle/>
                     <a:p>
                       <a:pPr algn="l"/>
@@ -4639,7 +4731,7 @@
                 </a:tc>
                 <a:tc>
                   <a:txBody>
-                    <a:bodyPr wrap="square"/>
+                    <a:bodyPr/>
                     <a:lstStyle/>
                     <a:p>
                       <a:pPr algn="l"/>
@@ -4662,7 +4754,7 @@
                 </a:tc>
                 <a:tc>
                   <a:txBody>
-                    <a:bodyPr wrap="square"/>
+                    <a:bodyPr/>
                     <a:lstStyle/>
                     <a:p>
                       <a:pPr algn="ctr"/>
@@ -4683,11 +4775,16 @@
                     </a:solidFill>
                   </a:tcPr>
                 </a:tc>
+                <a:extLst>
+                  <a:ext uri="{0D108BD9-81ED-4DB2-BD59-A6C34878D82A}">
+                    <a16:rowId xmlns:a16="http://schemas.microsoft.com/office/drawing/2014/main" val="10009"/>
+                  </a:ext>
+                </a:extLst>
               </a:tr>
               <a:tr h="350000">
                 <a:tc>
                   <a:txBody>
-                    <a:bodyPr wrap="square"/>
+                    <a:bodyPr/>
                     <a:lstStyle/>
                     <a:p>
                       <a:pPr algn="l"/>
@@ -4710,7 +4807,7 @@
                 </a:tc>
                 <a:tc>
                   <a:txBody>
-                    <a:bodyPr wrap="square"/>
+                    <a:bodyPr/>
                     <a:lstStyle/>
                     <a:p>
                       <a:pPr algn="l"/>
@@ -4733,7 +4830,7 @@
                 </a:tc>
                 <a:tc>
                   <a:txBody>
-                    <a:bodyPr wrap="square"/>
+                    <a:bodyPr/>
                     <a:lstStyle/>
                     <a:p>
                       <a:pPr algn="ctr"/>
@@ -4754,11 +4851,16 @@
                     </a:solidFill>
                   </a:tcPr>
                 </a:tc>
+                <a:extLst>
+                  <a:ext uri="{0D108BD9-81ED-4DB2-BD59-A6C34878D82A}">
+                    <a16:rowId xmlns:a16="http://schemas.microsoft.com/office/drawing/2014/main" val="10010"/>
+                  </a:ext>
+                </a:extLst>
               </a:tr>
               <a:tr h="350000">
                 <a:tc>
                   <a:txBody>
-                    <a:bodyPr wrap="square"/>
+                    <a:bodyPr/>
                     <a:lstStyle/>
                     <a:p>
                       <a:pPr algn="l"/>
@@ -4781,7 +4883,7 @@
                 </a:tc>
                 <a:tc>
                   <a:txBody>
-                    <a:bodyPr wrap="square"/>
+                    <a:bodyPr/>
                     <a:lstStyle/>
                     <a:p>
                       <a:pPr algn="l"/>
@@ -4804,7 +4906,7 @@
                 </a:tc>
                 <a:tc>
                   <a:txBody>
-                    <a:bodyPr wrap="square"/>
+                    <a:bodyPr/>
                     <a:lstStyle/>
                     <a:p>
                       <a:pPr algn="ctr"/>
@@ -4825,11 +4927,16 @@
                     </a:solidFill>
                   </a:tcPr>
                 </a:tc>
+                <a:extLst>
+                  <a:ext uri="{0D108BD9-81ED-4DB2-BD59-A6C34878D82A}">
+                    <a16:rowId xmlns:a16="http://schemas.microsoft.com/office/drawing/2014/main" val="10011"/>
+                  </a:ext>
+                </a:extLst>
               </a:tr>
               <a:tr h="350000">
                 <a:tc>
                   <a:txBody>
-                    <a:bodyPr wrap="square"/>
+                    <a:bodyPr/>
                     <a:lstStyle/>
                     <a:p>
                       <a:pPr algn="l"/>
@@ -4852,7 +4959,7 @@
                 </a:tc>
                 <a:tc>
                   <a:txBody>
-                    <a:bodyPr wrap="square"/>
+                    <a:bodyPr/>
                     <a:lstStyle/>
                     <a:p>
                       <a:pPr algn="l"/>
@@ -4875,7 +4982,7 @@
                 </a:tc>
                 <a:tc>
                   <a:txBody>
-                    <a:bodyPr wrap="square"/>
+                    <a:bodyPr/>
                     <a:lstStyle/>
                     <a:p>
                       <a:pPr algn="ctr"/>
@@ -4896,11 +5003,16 @@
                     </a:solidFill>
                   </a:tcPr>
                 </a:tc>
+                <a:extLst>
+                  <a:ext uri="{0D108BD9-81ED-4DB2-BD59-A6C34878D82A}">
+                    <a16:rowId xmlns:a16="http://schemas.microsoft.com/office/drawing/2014/main" val="10012"/>
+                  </a:ext>
+                </a:extLst>
               </a:tr>
               <a:tr h="350000">
                 <a:tc>
                   <a:txBody>
-                    <a:bodyPr wrap="square"/>
+                    <a:bodyPr/>
                     <a:lstStyle/>
                     <a:p>
                       <a:pPr algn="l"/>
@@ -4923,7 +5035,7 @@
                 </a:tc>
                 <a:tc>
                   <a:txBody>
-                    <a:bodyPr wrap="square"/>
+                    <a:bodyPr/>
                     <a:lstStyle/>
                     <a:p>
                       <a:pPr algn="l"/>
@@ -4946,7 +5058,7 @@
                 </a:tc>
                 <a:tc>
                   <a:txBody>
-                    <a:bodyPr wrap="square"/>
+                    <a:bodyPr/>
                     <a:lstStyle/>
                     <a:p>
                       <a:pPr algn="ctr"/>
@@ -4967,11 +5079,16 @@
                     </a:solidFill>
                   </a:tcPr>
                 </a:tc>
+                <a:extLst>
+                  <a:ext uri="{0D108BD9-81ED-4DB2-BD59-A6C34878D82A}">
+                    <a16:rowId xmlns:a16="http://schemas.microsoft.com/office/drawing/2014/main" val="10013"/>
+                  </a:ext>
+                </a:extLst>
               </a:tr>
               <a:tr h="350000">
                 <a:tc>
                   <a:txBody>
-                    <a:bodyPr wrap="square"/>
+                    <a:bodyPr/>
                     <a:lstStyle/>
                     <a:p>
                       <a:pPr algn="l"/>
@@ -4994,7 +5111,7 @@
                 </a:tc>
                 <a:tc>
                   <a:txBody>
-                    <a:bodyPr wrap="square"/>
+                    <a:bodyPr/>
                     <a:lstStyle/>
                     <a:p>
                       <a:pPr algn="l"/>
@@ -5017,7 +5134,7 @@
                 </a:tc>
                 <a:tc>
                   <a:txBody>
-                    <a:bodyPr wrap="square"/>
+                    <a:bodyPr/>
                     <a:lstStyle/>
                     <a:p>
                       <a:pPr algn="ctr"/>
@@ -5038,6 +5155,11 @@
                     </a:solidFill>
                   </a:tcPr>
                 </a:tc>
+                <a:extLst>
+                  <a:ext uri="{0D108BD9-81ED-4DB2-BD59-A6C34878D82A}">
+                    <a16:rowId xmlns:a16="http://schemas.microsoft.com/office/drawing/2014/main" val="10014"/>
+                  </a:ext>
+                </a:extLst>
               </a:tr>
             </a:tbl>
           </a:graphicData>
@@ -5052,7 +5174,7 @@
 </file>
 
 <file path=ppt/slides/slide4.xml><?xml version="1.0" encoding="utf-8"?>
-<p:sld xmlns:a="http://schemas.openxmlformats.org/drawingml/2006/main" xmlns:p="http://schemas.openxmlformats.org/presentationml/2006/main" xmlns:r="http://schemas.openxmlformats.org/officeDocument/2006/relationships">
+<p:sld xmlns:a="http://schemas.openxmlformats.org/drawingml/2006/main" xmlns:r="http://schemas.openxmlformats.org/officeDocument/2006/relationships" xmlns:p="http://schemas.openxmlformats.org/presentationml/2006/main">
   <p:cSld>
     <p:spTree>
       <p:nvGrpSpPr>
@@ -5060,7 +5182,14 @@
         <p:cNvGrpSpPr/>
         <p:nvPr/>
       </p:nvGrpSpPr>
-      <p:grpSpPr/>
+      <p:grpSpPr>
+        <a:xfrm>
+          <a:off x="0" y="0"/>
+          <a:ext cx="0" cy="0"/>
+          <a:chOff x="0" y="0"/>
+          <a:chExt cx="0" cy="0"/>
+        </a:xfrm>
+      </p:grpSpPr>
       <p:sp>
         <p:nvSpPr>
           <p:cNvPr id="2" name="Right Triangle 1"/>
@@ -5102,6 +5231,7 @@
           <a:lstStyle/>
           <a:p>
             <a:pPr algn="ctr"/>
+            <a:endParaRPr/>
           </a:p>
         </p:txBody>
       </p:sp>
@@ -5304,60 +5434,6 @@
           </a:p>
         </p:txBody>
       </p:sp>
-      <p:sp>
-        <p:nvSpPr>
-          <p:cNvPr id="7" name="Rounded Rectangle 6"/>
-          <p:cNvSpPr/>
-          <p:nvPr/>
-        </p:nvSpPr>
-        <p:spPr>
-          <a:xfrm>
-            <a:off x="700000" y="5600000"/>
-            <a:ext cx="10800000" cy="650000"/>
-          </a:xfrm>
-          <a:prstGeom prst="roundRect">
-            <a:avLst/>
-          </a:prstGeom>
-          <a:solidFill>
-            <a:srgbClr val="FFFFFF"/>
-          </a:solidFill>
-          <a:ln w="19050">
-            <a:solidFill>
-              <a:srgbClr val="1C3087"/>
-            </a:solidFill>
-          </a:ln>
-          <a:effectLst/>
-        </p:spPr>
-        <p:style>
-          <a:lnRef idx="1">
-            <a:schemeClr val="accent1"/>
-          </a:lnRef>
-          <a:fillRef idx="3">
-            <a:schemeClr val="accent1"/>
-          </a:fillRef>
-          <a:effectRef idx="2">
-            <a:schemeClr val="accent1"/>
-          </a:effectRef>
-          <a:fontRef idx="minor">
-            <a:schemeClr val="lt1"/>
-          </a:fontRef>
-        </p:style>
-        <p:txBody>
-          <a:bodyPr rtlCol="0" anchor="ctr" wrap="square" lIns="180000"/>
-          <a:lstStyle/>
-          <a:p>
-            <a:pPr algn="ctr"/>
-            <a:r>
-              <a:rPr sz="1400" b="1">
-                <a:solidFill>
-                  <a:srgbClr val="1C3087"/>
-                </a:solidFill>
-              </a:rPr>
-              <a:t>Modelo final: round8_distress_fix_scale083.csv</a:t>
-            </a:r>
-          </a:p>
-        </p:txBody>
-      </p:sp>
     </p:spTree>
   </p:cSld>
   <p:clrMapOvr>
@@ -5367,7 +5443,7 @@
 </file>
 
 <file path=ppt/slides/slide5.xml><?xml version="1.0" encoding="utf-8"?>
-<p:sld xmlns:a="http://schemas.openxmlformats.org/drawingml/2006/main" xmlns:p="http://schemas.openxmlformats.org/presentationml/2006/main" xmlns:r="http://schemas.openxmlformats.org/officeDocument/2006/relationships">
+<p:sld xmlns:a="http://schemas.openxmlformats.org/drawingml/2006/main" xmlns:r="http://schemas.openxmlformats.org/officeDocument/2006/relationships" xmlns:p="http://schemas.openxmlformats.org/presentationml/2006/main">
   <p:cSld>
     <p:spTree>
       <p:nvGrpSpPr>
@@ -5375,7 +5451,14 @@
         <p:cNvGrpSpPr/>
         <p:nvPr/>
       </p:nvGrpSpPr>
-      <p:grpSpPr/>
+      <p:grpSpPr>
+        <a:xfrm>
+          <a:off x="0" y="0"/>
+          <a:ext cx="0" cy="0"/>
+          <a:chOff x="0" y="0"/>
+          <a:chExt cx="0" cy="0"/>
+        </a:xfrm>
+      </p:grpSpPr>
       <p:sp>
         <p:nvSpPr>
           <p:cNvPr id="2" name="Right Triangle 1"/>
@@ -5384,7 +5467,7 @@
         </p:nvSpPr>
         <p:spPr>
           <a:xfrm>
-            <a:off x="186158" y="-198852"/>
+            <a:off x="-50000" y="0"/>
             <a:ext cx="1901656" cy="2273969"/>
           </a:xfrm>
           <a:prstGeom prst="rtTriangle">
@@ -5417,6 +5500,7 @@
           <a:lstStyle/>
           <a:p>
             <a:pPr algn="ctr"/>
+            <a:endParaRPr/>
           </a:p>
         </p:txBody>
       </p:sp>
@@ -5436,7 +5520,7 @@
         </p:blipFill>
         <p:spPr>
           <a:xfrm>
-            <a:off x="10145000" y="5550000"/>
+            <a:off x="10445496" y="62064"/>
             <a:ext cx="1746504" cy="1170432"/>
           </a:xfrm>
           <a:prstGeom prst="rect">
@@ -5567,13 +5651,265 @@
               </a:spcAft>
             </a:pPr>
             <a:r>
-              <a:rPr sz="1400">
+              <a:rPr sz="1400" dirty="0">
                 <a:solidFill>
                   <a:srgbClr val="222222"/>
                 </a:solidFill>
                 <a:latin typeface="Calibri"/>
               </a:rPr>
-              <a:t>Unico cambio respecto a Ronda 8: agregar 18 features semanticas extraidas de las descripciones con un LLM local (Ollama). Empeoro el modelo — y lo confirmamos con una comparacion controlada antes de descartarlo.</a:t>
+              <a:t>Unico </a:t>
+            </a:r>
+            <a:r>
+              <a:rPr sz="1400" dirty="0" err="1">
+                <a:solidFill>
+                  <a:srgbClr val="222222"/>
+                </a:solidFill>
+                <a:latin typeface="Calibri"/>
+              </a:rPr>
+              <a:t>cambio</a:t>
+            </a:r>
+            <a:r>
+              <a:rPr sz="1400" dirty="0">
+                <a:solidFill>
+                  <a:srgbClr val="222222"/>
+                </a:solidFill>
+                <a:latin typeface="Calibri"/>
+              </a:rPr>
+              <a:t> </a:t>
+            </a:r>
+            <a:r>
+              <a:rPr sz="1400" dirty="0" err="1">
+                <a:solidFill>
+                  <a:srgbClr val="222222"/>
+                </a:solidFill>
+                <a:latin typeface="Calibri"/>
+              </a:rPr>
+              <a:t>respecto</a:t>
+            </a:r>
+            <a:r>
+              <a:rPr sz="1400" dirty="0">
+                <a:solidFill>
+                  <a:srgbClr val="222222"/>
+                </a:solidFill>
+                <a:latin typeface="Calibri"/>
+              </a:rPr>
+              <a:t> a Ronda 8: </a:t>
+            </a:r>
+            <a:r>
+              <a:rPr sz="1400" dirty="0" err="1">
+                <a:solidFill>
+                  <a:srgbClr val="222222"/>
+                </a:solidFill>
+                <a:latin typeface="Calibri"/>
+              </a:rPr>
+              <a:t>agregar</a:t>
+            </a:r>
+            <a:r>
+              <a:rPr sz="1400" dirty="0">
+                <a:solidFill>
+                  <a:srgbClr val="222222"/>
+                </a:solidFill>
+                <a:latin typeface="Calibri"/>
+              </a:rPr>
+              <a:t> 18 features </a:t>
+            </a:r>
+            <a:r>
+              <a:rPr sz="1400" dirty="0" err="1">
+                <a:solidFill>
+                  <a:srgbClr val="222222"/>
+                </a:solidFill>
+                <a:latin typeface="Calibri"/>
+              </a:rPr>
+              <a:t>semanticas</a:t>
+            </a:r>
+            <a:r>
+              <a:rPr sz="1400" dirty="0">
+                <a:solidFill>
+                  <a:srgbClr val="222222"/>
+                </a:solidFill>
+                <a:latin typeface="Calibri"/>
+              </a:rPr>
+              <a:t> </a:t>
+            </a:r>
+            <a:r>
+              <a:rPr sz="1400" dirty="0" err="1">
+                <a:solidFill>
+                  <a:srgbClr val="222222"/>
+                </a:solidFill>
+                <a:latin typeface="Calibri"/>
+              </a:rPr>
+              <a:t>extraidas</a:t>
+            </a:r>
+            <a:r>
+              <a:rPr sz="1400" dirty="0">
+                <a:solidFill>
+                  <a:srgbClr val="222222"/>
+                </a:solidFill>
+                <a:latin typeface="Calibri"/>
+              </a:rPr>
+              <a:t> de las </a:t>
+            </a:r>
+            <a:r>
+              <a:rPr sz="1400" dirty="0" err="1">
+                <a:solidFill>
+                  <a:srgbClr val="222222"/>
+                </a:solidFill>
+                <a:latin typeface="Calibri"/>
+              </a:rPr>
+              <a:t>descripciones</a:t>
+            </a:r>
+            <a:r>
+              <a:rPr sz="1400" dirty="0">
+                <a:solidFill>
+                  <a:srgbClr val="222222"/>
+                </a:solidFill>
+                <a:latin typeface="Calibri"/>
+              </a:rPr>
+              <a:t> con un LLM local (</a:t>
+            </a:r>
+            <a:r>
+              <a:rPr sz="1400" dirty="0" err="1">
+                <a:solidFill>
+                  <a:srgbClr val="222222"/>
+                </a:solidFill>
+                <a:latin typeface="Calibri"/>
+              </a:rPr>
+              <a:t>Ollama</a:t>
+            </a:r>
+            <a:r>
+              <a:rPr sz="1400" dirty="0">
+                <a:solidFill>
+                  <a:srgbClr val="222222"/>
+                </a:solidFill>
+                <a:latin typeface="Calibri"/>
+              </a:rPr>
+              <a:t>). </a:t>
+            </a:r>
+            <a:r>
+              <a:rPr sz="1400" dirty="0" err="1">
+                <a:solidFill>
+                  <a:srgbClr val="222222"/>
+                </a:solidFill>
+                <a:latin typeface="Calibri"/>
+              </a:rPr>
+              <a:t>Empeoro</a:t>
+            </a:r>
+            <a:r>
+              <a:rPr sz="1400" dirty="0">
+                <a:solidFill>
+                  <a:srgbClr val="222222"/>
+                </a:solidFill>
+                <a:latin typeface="Calibri"/>
+              </a:rPr>
+              <a:t> el </a:t>
+            </a:r>
+            <a:r>
+              <a:rPr sz="1400" dirty="0" err="1">
+                <a:solidFill>
+                  <a:srgbClr val="222222"/>
+                </a:solidFill>
+                <a:latin typeface="Calibri"/>
+              </a:rPr>
+              <a:t>modelo</a:t>
+            </a:r>
+            <a:r>
+              <a:rPr sz="1400" dirty="0">
+                <a:solidFill>
+                  <a:srgbClr val="222222"/>
+                </a:solidFill>
+                <a:latin typeface="Calibri"/>
+              </a:rPr>
+              <a:t> — y lo </a:t>
+            </a:r>
+            <a:r>
+              <a:rPr sz="1400" dirty="0" err="1">
+                <a:solidFill>
+                  <a:srgbClr val="222222"/>
+                </a:solidFill>
+                <a:latin typeface="Calibri"/>
+              </a:rPr>
+              <a:t>confirmamos</a:t>
+            </a:r>
+            <a:r>
+              <a:rPr sz="1400" dirty="0">
+                <a:solidFill>
+                  <a:srgbClr val="222222"/>
+                </a:solidFill>
+                <a:latin typeface="Calibri"/>
+              </a:rPr>
+              <a:t> con </a:t>
+            </a:r>
+            <a:r>
+              <a:rPr sz="1400" dirty="0" err="1">
+                <a:solidFill>
+                  <a:srgbClr val="222222"/>
+                </a:solidFill>
+                <a:latin typeface="Calibri"/>
+              </a:rPr>
+              <a:t>una</a:t>
+            </a:r>
+            <a:r>
+              <a:rPr sz="1400" dirty="0">
+                <a:solidFill>
+                  <a:srgbClr val="222222"/>
+                </a:solidFill>
+                <a:latin typeface="Calibri"/>
+              </a:rPr>
+              <a:t> </a:t>
+            </a:r>
+            <a:r>
+              <a:rPr sz="1400" dirty="0" err="1">
+                <a:solidFill>
+                  <a:srgbClr val="222222"/>
+                </a:solidFill>
+                <a:latin typeface="Calibri"/>
+              </a:rPr>
+              <a:t>comparacion</a:t>
+            </a:r>
+            <a:r>
+              <a:rPr sz="1400" dirty="0">
+                <a:solidFill>
+                  <a:srgbClr val="222222"/>
+                </a:solidFill>
+                <a:latin typeface="Calibri"/>
+              </a:rPr>
+              <a:t> </a:t>
+            </a:r>
+            <a:r>
+              <a:rPr sz="1400" dirty="0" err="1">
+                <a:solidFill>
+                  <a:srgbClr val="222222"/>
+                </a:solidFill>
+                <a:latin typeface="Calibri"/>
+              </a:rPr>
+              <a:t>controlada</a:t>
+            </a:r>
+            <a:r>
+              <a:rPr sz="1400" dirty="0">
+                <a:solidFill>
+                  <a:srgbClr val="222222"/>
+                </a:solidFill>
+                <a:latin typeface="Calibri"/>
+              </a:rPr>
+              <a:t> antes de </a:t>
+            </a:r>
+            <a:r>
+              <a:rPr sz="1400" dirty="0" err="1">
+                <a:solidFill>
+                  <a:srgbClr val="222222"/>
+                </a:solidFill>
+                <a:latin typeface="Calibri"/>
+              </a:rPr>
+              <a:t>descartarlo</a:t>
+            </a:r>
+            <a:r>
+              <a:rPr sz="1400" dirty="0">
+                <a:solidFill>
+                  <a:srgbClr val="222222"/>
+                </a:solidFill>
+                <a:latin typeface="Calibri"/>
+              </a:rPr>
+              <a:t>.</a:t>
             </a:r>
           </a:p>
         </p:txBody>
@@ -5587,7 +5923,7 @@
 </file>
 
 <file path=ppt/slides/slide6.xml><?xml version="1.0" encoding="utf-8"?>
-<p:sld xmlns:a="http://schemas.openxmlformats.org/drawingml/2006/main" xmlns:p="http://schemas.openxmlformats.org/presentationml/2006/main" xmlns:r="http://schemas.openxmlformats.org/officeDocument/2006/relationships">
+<p:sld xmlns:a="http://schemas.openxmlformats.org/drawingml/2006/main" xmlns:r="http://schemas.openxmlformats.org/officeDocument/2006/relationships" xmlns:p="http://schemas.openxmlformats.org/presentationml/2006/main">
   <p:cSld>
     <p:spTree>
       <p:nvGrpSpPr>
@@ -5595,7 +5931,14 @@
         <p:cNvGrpSpPr/>
         <p:nvPr/>
       </p:nvGrpSpPr>
-      <p:grpSpPr/>
+      <p:grpSpPr>
+        <a:xfrm>
+          <a:off x="0" y="0"/>
+          <a:ext cx="0" cy="0"/>
+          <a:chOff x="0" y="0"/>
+          <a:chExt cx="0" cy="0"/>
+        </a:xfrm>
+      </p:grpSpPr>
       <p:sp>
         <p:nvSpPr>
           <p:cNvPr id="2" name="Right Triangle 1"/>
@@ -5637,6 +5980,7 @@
           <a:lstStyle/>
           <a:p>
             <a:pPr algn="ctr"/>
+            <a:endParaRPr/>
           </a:p>
         </p:txBody>
       </p:sp>
@@ -5825,7 +6169,7 @@
 </file>
 
 <file path=ppt/slides/slide7.xml><?xml version="1.0" encoding="utf-8"?>
-<p:sld xmlns:a="http://schemas.openxmlformats.org/drawingml/2006/main" xmlns:p="http://schemas.openxmlformats.org/presentationml/2006/main" xmlns:r="http://schemas.openxmlformats.org/officeDocument/2006/relationships">
+<p:sld xmlns:a="http://schemas.openxmlformats.org/drawingml/2006/main" xmlns:r="http://schemas.openxmlformats.org/officeDocument/2006/relationships" xmlns:p="http://schemas.openxmlformats.org/presentationml/2006/main">
   <p:cSld>
     <p:spTree>
       <p:nvGrpSpPr>
@@ -5833,7 +6177,14 @@
         <p:cNvGrpSpPr/>
         <p:nvPr/>
       </p:nvGrpSpPr>
-      <p:grpSpPr/>
+      <p:grpSpPr>
+        <a:xfrm>
+          <a:off x="0" y="0"/>
+          <a:ext cx="0" cy="0"/>
+          <a:chOff x="0" y="0"/>
+          <a:chExt cx="0" cy="0"/>
+        </a:xfrm>
+      </p:grpSpPr>
       <p:sp>
         <p:nvSpPr>
           <p:cNvPr id="2" name="Right Triangle 1"/>
@@ -5842,7 +6193,7 @@
         </p:nvSpPr>
         <p:spPr>
           <a:xfrm>
-            <a:off x="186158" y="-198852"/>
+            <a:off x="11492000" y="-923969"/>
             <a:ext cx="1901656" cy="2273969"/>
           </a:xfrm>
           <a:prstGeom prst="rtTriangle">
@@ -5875,6 +6226,7 @@
           <a:lstStyle/>
           <a:p>
             <a:pPr algn="ctr"/>
+            <a:endParaRPr/>
           </a:p>
         </p:txBody>
       </p:sp>
@@ -6031,15 +6383,39 @@
                 <a:tableStyleId>{5C22544A-7EE6-4342-B048-85BDC9FD1C3A}</a:tableStyleId>
               </a:tblPr>
               <a:tblGrid>
-                <a:gridCol w="2350000"/>
-                <a:gridCol w="2350000"/>
-                <a:gridCol w="2350000"/>
-                <a:gridCol w="2350000"/>
+                <a:gridCol w="2350000">
+                  <a:extLst>
+                    <a:ext uri="{9D8B030D-6E8A-4147-A177-3AD203B41FA5}">
+                      <a16:colId xmlns:a16="http://schemas.microsoft.com/office/drawing/2014/main" val="20000"/>
+                    </a:ext>
+                  </a:extLst>
+                </a:gridCol>
+                <a:gridCol w="2350000">
+                  <a:extLst>
+                    <a:ext uri="{9D8B030D-6E8A-4147-A177-3AD203B41FA5}">
+                      <a16:colId xmlns:a16="http://schemas.microsoft.com/office/drawing/2014/main" val="20001"/>
+                    </a:ext>
+                  </a:extLst>
+                </a:gridCol>
+                <a:gridCol w="2350000">
+                  <a:extLst>
+                    <a:ext uri="{9D8B030D-6E8A-4147-A177-3AD203B41FA5}">
+                      <a16:colId xmlns:a16="http://schemas.microsoft.com/office/drawing/2014/main" val="20002"/>
+                    </a:ext>
+                  </a:extLst>
+                </a:gridCol>
+                <a:gridCol w="2350000">
+                  <a:extLst>
+                    <a:ext uri="{9D8B030D-6E8A-4147-A177-3AD203B41FA5}">
+                      <a16:colId xmlns:a16="http://schemas.microsoft.com/office/drawing/2014/main" val="20003"/>
+                    </a:ext>
+                  </a:extLst>
+                </a:gridCol>
               </a:tblGrid>
               <a:tr h="400000">
                 <a:tc>
                   <a:txBody>
-                    <a:bodyPr wrap="square"/>
+                    <a:bodyPr/>
                     <a:lstStyle/>
                     <a:p>
                       <a:pPr algn="ctr"/>
@@ -6062,7 +6438,7 @@
                 </a:tc>
                 <a:tc>
                   <a:txBody>
-                    <a:bodyPr wrap="square"/>
+                    <a:bodyPr/>
                     <a:lstStyle/>
                     <a:p>
                       <a:pPr algn="ctr"/>
@@ -6085,7 +6461,7 @@
                 </a:tc>
                 <a:tc>
                   <a:txBody>
-                    <a:bodyPr wrap="square"/>
+                    <a:bodyPr/>
                     <a:lstStyle/>
                     <a:p>
                       <a:pPr algn="ctr"/>
@@ -6108,7 +6484,7 @@
                 </a:tc>
                 <a:tc>
                   <a:txBody>
-                    <a:bodyPr wrap="square"/>
+                    <a:bodyPr/>
                     <a:lstStyle/>
                     <a:p>
                       <a:pPr algn="ctr"/>
@@ -6129,11 +6505,16 @@
                     </a:solidFill>
                   </a:tcPr>
                 </a:tc>
+                <a:extLst>
+                  <a:ext uri="{0D108BD9-81ED-4DB2-BD59-A6C34878D82A}">
+                    <a16:rowId xmlns:a16="http://schemas.microsoft.com/office/drawing/2014/main" val="10000"/>
+                  </a:ext>
+                </a:extLst>
               </a:tr>
               <a:tr h="400000">
                 <a:tc>
                   <a:txBody>
-                    <a:bodyPr wrap="square"/>
+                    <a:bodyPr/>
                     <a:lstStyle/>
                     <a:p>
                       <a:pPr algn="ctr"/>
@@ -6156,7 +6537,7 @@
                 </a:tc>
                 <a:tc>
                   <a:txBody>
-                    <a:bodyPr wrap="square"/>
+                    <a:bodyPr/>
                     <a:lstStyle/>
                     <a:p>
                       <a:pPr algn="ctr"/>
@@ -6179,7 +6560,7 @@
                 </a:tc>
                 <a:tc>
                   <a:txBody>
-                    <a:bodyPr wrap="square"/>
+                    <a:bodyPr/>
                     <a:lstStyle/>
                     <a:p>
                       <a:pPr algn="ctr"/>
@@ -6202,7 +6583,7 @@
                 </a:tc>
                 <a:tc>
                   <a:txBody>
-                    <a:bodyPr wrap="square"/>
+                    <a:bodyPr/>
                     <a:lstStyle/>
                     <a:p>
                       <a:pPr algn="ctr"/>
@@ -6223,11 +6604,16 @@
                     </a:solidFill>
                   </a:tcPr>
                 </a:tc>
+                <a:extLst>
+                  <a:ext uri="{0D108BD9-81ED-4DB2-BD59-A6C34878D82A}">
+                    <a16:rowId xmlns:a16="http://schemas.microsoft.com/office/drawing/2014/main" val="10001"/>
+                  </a:ext>
+                </a:extLst>
               </a:tr>
               <a:tr h="400000">
                 <a:tc>
                   <a:txBody>
-                    <a:bodyPr wrap="square"/>
+                    <a:bodyPr/>
                     <a:lstStyle/>
                     <a:p>
                       <a:pPr algn="ctr"/>
@@ -6250,7 +6636,7 @@
                 </a:tc>
                 <a:tc>
                   <a:txBody>
-                    <a:bodyPr wrap="square"/>
+                    <a:bodyPr/>
                     <a:lstStyle/>
                     <a:p>
                       <a:pPr algn="ctr"/>
@@ -6273,7 +6659,7 @@
                 </a:tc>
                 <a:tc>
                   <a:txBody>
-                    <a:bodyPr wrap="square"/>
+                    <a:bodyPr/>
                     <a:lstStyle/>
                     <a:p>
                       <a:pPr algn="ctr"/>
@@ -6296,7 +6682,7 @@
                 </a:tc>
                 <a:tc>
                   <a:txBody>
-                    <a:bodyPr wrap="square"/>
+                    <a:bodyPr/>
                     <a:lstStyle/>
                     <a:p>
                       <a:pPr algn="ctr"/>
@@ -6317,11 +6703,16 @@
                     </a:solidFill>
                   </a:tcPr>
                 </a:tc>
+                <a:extLst>
+                  <a:ext uri="{0D108BD9-81ED-4DB2-BD59-A6C34878D82A}">
+                    <a16:rowId xmlns:a16="http://schemas.microsoft.com/office/drawing/2014/main" val="10002"/>
+                  </a:ext>
+                </a:extLst>
               </a:tr>
               <a:tr h="400000">
                 <a:tc>
                   <a:txBody>
-                    <a:bodyPr wrap="square"/>
+                    <a:bodyPr/>
                     <a:lstStyle/>
                     <a:p>
                       <a:pPr algn="ctr"/>
@@ -6344,7 +6735,7 @@
                 </a:tc>
                 <a:tc>
                   <a:txBody>
-                    <a:bodyPr wrap="square"/>
+                    <a:bodyPr/>
                     <a:lstStyle/>
                     <a:p>
                       <a:pPr algn="ctr"/>
@@ -6367,7 +6758,7 @@
                 </a:tc>
                 <a:tc>
                   <a:txBody>
-                    <a:bodyPr wrap="square"/>
+                    <a:bodyPr/>
                     <a:lstStyle/>
                     <a:p>
                       <a:pPr algn="ctr"/>
@@ -6390,7 +6781,7 @@
                 </a:tc>
                 <a:tc>
                   <a:txBody>
-                    <a:bodyPr wrap="square"/>
+                    <a:bodyPr/>
                     <a:lstStyle/>
                     <a:p>
                       <a:pPr algn="ctr"/>
@@ -6411,6 +6802,11 @@
                     </a:solidFill>
                   </a:tcPr>
                 </a:tc>
+                <a:extLst>
+                  <a:ext uri="{0D108BD9-81ED-4DB2-BD59-A6C34878D82A}">
+                    <a16:rowId xmlns:a16="http://schemas.microsoft.com/office/drawing/2014/main" val="10003"/>
+                  </a:ext>
+                </a:extLst>
               </a:tr>
             </a:tbl>
           </a:graphicData>
@@ -6455,7 +6851,7 @@
           </a:fontRef>
         </p:style>
         <p:txBody>
-          <a:bodyPr rtlCol="0" anchor="ctr" wrap="square" lIns="180000"/>
+          <a:bodyPr wrap="square" lIns="180000" rtlCol="0" anchor="ctr"/>
           <a:lstStyle/>
           <a:p>
             <a:pPr algn="ctr"/>
@@ -6521,7 +6917,7 @@
 </file>
 
 <file path=ppt/slides/slide8.xml><?xml version="1.0" encoding="utf-8"?>
-<p:sld xmlns:a="http://schemas.openxmlformats.org/drawingml/2006/main" xmlns:p="http://schemas.openxmlformats.org/presentationml/2006/main" xmlns:r="http://schemas.openxmlformats.org/officeDocument/2006/relationships">
+<p:sld xmlns:a="http://schemas.openxmlformats.org/drawingml/2006/main" xmlns:r="http://schemas.openxmlformats.org/officeDocument/2006/relationships" xmlns:p="http://schemas.openxmlformats.org/presentationml/2006/main">
   <p:cSld>
     <p:spTree>
       <p:nvGrpSpPr>
@@ -6529,7 +6925,14 @@
         <p:cNvGrpSpPr/>
         <p:nvPr/>
       </p:nvGrpSpPr>
-      <p:grpSpPr/>
+      <p:grpSpPr>
+        <a:xfrm>
+          <a:off x="0" y="0"/>
+          <a:ext cx="0" cy="0"/>
+          <a:chOff x="0" y="0"/>
+          <a:chExt cx="0" cy="0"/>
+        </a:xfrm>
+      </p:grpSpPr>
       <p:sp>
         <p:nvSpPr>
           <p:cNvPr id="2" name="Right Triangle 1"/>
@@ -6571,6 +6974,7 @@
           <a:lstStyle/>
           <a:p>
             <a:pPr algn="ctr"/>
+            <a:endParaRPr/>
           </a:p>
         </p:txBody>
       </p:sp>
@@ -6727,15 +7131,39 @@
                 <a:tableStyleId>{5C22544A-7EE6-4342-B048-85BDC9FD1C3A}</a:tableStyleId>
               </a:tblPr>
               <a:tblGrid>
-                <a:gridCol w="2250000"/>
-                <a:gridCol w="2250000"/>
-                <a:gridCol w="2250000"/>
-                <a:gridCol w="2250000"/>
+                <a:gridCol w="2250000">
+                  <a:extLst>
+                    <a:ext uri="{9D8B030D-6E8A-4147-A177-3AD203B41FA5}">
+                      <a16:colId xmlns:a16="http://schemas.microsoft.com/office/drawing/2014/main" val="20000"/>
+                    </a:ext>
+                  </a:extLst>
+                </a:gridCol>
+                <a:gridCol w="2250000">
+                  <a:extLst>
+                    <a:ext uri="{9D8B030D-6E8A-4147-A177-3AD203B41FA5}">
+                      <a16:colId xmlns:a16="http://schemas.microsoft.com/office/drawing/2014/main" val="20001"/>
+                    </a:ext>
+                  </a:extLst>
+                </a:gridCol>
+                <a:gridCol w="2250000">
+                  <a:extLst>
+                    <a:ext uri="{9D8B030D-6E8A-4147-A177-3AD203B41FA5}">
+                      <a16:colId xmlns:a16="http://schemas.microsoft.com/office/drawing/2014/main" val="20002"/>
+                    </a:ext>
+                  </a:extLst>
+                </a:gridCol>
+                <a:gridCol w="2250000">
+                  <a:extLst>
+                    <a:ext uri="{9D8B030D-6E8A-4147-A177-3AD203B41FA5}">
+                      <a16:colId xmlns:a16="http://schemas.microsoft.com/office/drawing/2014/main" val="20003"/>
+                    </a:ext>
+                  </a:extLst>
+                </a:gridCol>
               </a:tblGrid>
               <a:tr h="375000">
                 <a:tc>
                   <a:txBody>
-                    <a:bodyPr wrap="square"/>
+                    <a:bodyPr/>
                     <a:lstStyle/>
                     <a:p>
                       <a:pPr algn="ctr"/>
@@ -6758,7 +7186,7 @@
                 </a:tc>
                 <a:tc>
                   <a:txBody>
-                    <a:bodyPr wrap="square"/>
+                    <a:bodyPr/>
                     <a:lstStyle/>
                     <a:p>
                       <a:pPr algn="ctr"/>
@@ -6781,7 +7209,7 @@
                 </a:tc>
                 <a:tc>
                   <a:txBody>
-                    <a:bodyPr wrap="square"/>
+                    <a:bodyPr/>
                     <a:lstStyle/>
                     <a:p>
                       <a:pPr algn="ctr"/>
@@ -6804,7 +7232,7 @@
                 </a:tc>
                 <a:tc>
                   <a:txBody>
-                    <a:bodyPr wrap="square"/>
+                    <a:bodyPr/>
                     <a:lstStyle/>
                     <a:p>
                       <a:pPr algn="ctr"/>
@@ -6825,11 +7253,16 @@
                     </a:solidFill>
                   </a:tcPr>
                 </a:tc>
+                <a:extLst>
+                  <a:ext uri="{0D108BD9-81ED-4DB2-BD59-A6C34878D82A}">
+                    <a16:rowId xmlns:a16="http://schemas.microsoft.com/office/drawing/2014/main" val="10000"/>
+                  </a:ext>
+                </a:extLst>
               </a:tr>
               <a:tr h="375000">
                 <a:tc>
                   <a:txBody>
-                    <a:bodyPr wrap="square"/>
+                    <a:bodyPr/>
                     <a:lstStyle/>
                     <a:p>
                       <a:pPr algn="ctr"/>
@@ -6852,7 +7285,7 @@
                 </a:tc>
                 <a:tc>
                   <a:txBody>
-                    <a:bodyPr wrap="square"/>
+                    <a:bodyPr/>
                     <a:lstStyle/>
                     <a:p>
                       <a:pPr algn="ctr"/>
@@ -6875,7 +7308,7 @@
                 </a:tc>
                 <a:tc>
                   <a:txBody>
-                    <a:bodyPr wrap="square"/>
+                    <a:bodyPr/>
                     <a:lstStyle/>
                     <a:p>
                       <a:pPr algn="ctr"/>
@@ -6898,7 +7331,7 @@
                 </a:tc>
                 <a:tc>
                   <a:txBody>
-                    <a:bodyPr wrap="square"/>
+                    <a:bodyPr/>
                     <a:lstStyle/>
                     <a:p>
                       <a:pPr algn="ctr"/>
@@ -6919,11 +7352,16 @@
                     </a:solidFill>
                   </a:tcPr>
                 </a:tc>
+                <a:extLst>
+                  <a:ext uri="{0D108BD9-81ED-4DB2-BD59-A6C34878D82A}">
+                    <a16:rowId xmlns:a16="http://schemas.microsoft.com/office/drawing/2014/main" val="10001"/>
+                  </a:ext>
+                </a:extLst>
               </a:tr>
               <a:tr h="375000">
                 <a:tc>
                   <a:txBody>
-                    <a:bodyPr wrap="square"/>
+                    <a:bodyPr/>
                     <a:lstStyle/>
                     <a:p>
                       <a:pPr algn="ctr"/>
@@ -6946,7 +7384,7 @@
                 </a:tc>
                 <a:tc>
                   <a:txBody>
-                    <a:bodyPr wrap="square"/>
+                    <a:bodyPr/>
                     <a:lstStyle/>
                     <a:p>
                       <a:pPr algn="ctr"/>
@@ -6969,7 +7407,7 @@
                 </a:tc>
                 <a:tc>
                   <a:txBody>
-                    <a:bodyPr wrap="square"/>
+                    <a:bodyPr/>
                     <a:lstStyle/>
                     <a:p>
                       <a:pPr algn="ctr"/>
@@ -6992,7 +7430,7 @@
                 </a:tc>
                 <a:tc>
                   <a:txBody>
-                    <a:bodyPr wrap="square"/>
+                    <a:bodyPr/>
                     <a:lstStyle/>
                     <a:p>
                       <a:pPr algn="ctr"/>
@@ -7013,11 +7451,16 @@
                     </a:solidFill>
                   </a:tcPr>
                 </a:tc>
+                <a:extLst>
+                  <a:ext uri="{0D108BD9-81ED-4DB2-BD59-A6C34878D82A}">
+                    <a16:rowId xmlns:a16="http://schemas.microsoft.com/office/drawing/2014/main" val="10002"/>
+                  </a:ext>
+                </a:extLst>
               </a:tr>
               <a:tr h="375000">
                 <a:tc>
                   <a:txBody>
-                    <a:bodyPr wrap="square"/>
+                    <a:bodyPr/>
                     <a:lstStyle/>
                     <a:p>
                       <a:pPr algn="ctr"/>
@@ -7040,7 +7483,7 @@
                 </a:tc>
                 <a:tc>
                   <a:txBody>
-                    <a:bodyPr wrap="square"/>
+                    <a:bodyPr/>
                     <a:lstStyle/>
                     <a:p>
                       <a:pPr algn="ctr"/>
@@ -7063,7 +7506,7 @@
                 </a:tc>
                 <a:tc>
                   <a:txBody>
-                    <a:bodyPr wrap="square"/>
+                    <a:bodyPr/>
                     <a:lstStyle/>
                     <a:p>
                       <a:pPr algn="ctr"/>
@@ -7086,7 +7529,7 @@
                 </a:tc>
                 <a:tc>
                   <a:txBody>
-                    <a:bodyPr wrap="square"/>
+                    <a:bodyPr/>
                     <a:lstStyle/>
                     <a:p>
                       <a:pPr algn="ctr"/>
@@ -7107,6 +7550,11 @@
                     </a:solidFill>
                   </a:tcPr>
                 </a:tc>
+                <a:extLst>
+                  <a:ext uri="{0D108BD9-81ED-4DB2-BD59-A6C34878D82A}">
+                    <a16:rowId xmlns:a16="http://schemas.microsoft.com/office/drawing/2014/main" val="10003"/>
+                  </a:ext>
+                </a:extLst>
               </a:tr>
             </a:tbl>
           </a:graphicData>
@@ -7151,7 +7599,7 @@
           </a:fontRef>
         </p:style>
         <p:txBody>
-          <a:bodyPr rtlCol="0" anchor="ctr" wrap="square" lIns="180000"/>
+          <a:bodyPr wrap="square" lIns="180000" rtlCol="0" anchor="ctr"/>
           <a:lstStyle/>
           <a:p>
             <a:pPr algn="ctr"/>
@@ -7217,7 +7665,7 @@
 </file>
 
 <file path=ppt/slides/slide9.xml><?xml version="1.0" encoding="utf-8"?>
-<p:sld xmlns:a="http://schemas.openxmlformats.org/drawingml/2006/main" xmlns:p="http://schemas.openxmlformats.org/presentationml/2006/main" xmlns:r="http://schemas.openxmlformats.org/officeDocument/2006/relationships">
+<p:sld xmlns:a="http://schemas.openxmlformats.org/drawingml/2006/main" xmlns:r="http://schemas.openxmlformats.org/officeDocument/2006/relationships" xmlns:p="http://schemas.openxmlformats.org/presentationml/2006/main">
   <p:cSld>
     <p:spTree>
       <p:nvGrpSpPr>
@@ -7225,7 +7673,14 @@
         <p:cNvGrpSpPr/>
         <p:nvPr/>
       </p:nvGrpSpPr>
-      <p:grpSpPr/>
+      <p:grpSpPr>
+        <a:xfrm>
+          <a:off x="0" y="0"/>
+          <a:ext cx="0" cy="0"/>
+          <a:chOff x="0" y="0"/>
+          <a:chExt cx="0" cy="0"/>
+        </a:xfrm>
+      </p:grpSpPr>
       <p:sp>
         <p:nvSpPr>
           <p:cNvPr id="2" name="Right Triangle 1"/>
@@ -7267,6 +7722,7 @@
           <a:lstStyle/>
           <a:p>
             <a:pPr algn="ctr"/>
+            <a:endParaRPr/>
           </a:p>
         </p:txBody>
       </p:sp>
@@ -7401,7 +7857,7 @@
           </a:fontRef>
         </p:style>
         <p:txBody>
-          <a:bodyPr rtlCol="0" anchor="ctr" wrap="square" lIns="180000"/>
+          <a:bodyPr wrap="square" lIns="180000" rtlCol="0" anchor="ctr"/>
           <a:lstStyle/>
           <a:p>
             <a:pPr algn="ctr"/>
